--- a/data-eng/decks/w5d1s3.pptx
+++ b/data-eng/decks/w5d1s3.pptx
@@ -3100,7 +3100,7 @@
       <p:grpSpPr/>
       <p:sp>
         <p:nvSpPr>
-          <p:cNvPr id="2" name="Oval 1"/>
+          <p:cNvPr id="2" name="deckgen:decor"/>
           <p:cNvSpPr/>
           <p:nvPr/>
         </p:nvSpPr>
@@ -3130,7 +3130,7 @@
       </p:sp>
       <p:sp>
         <p:nvSpPr>
-          <p:cNvPr id="3" name="Oval 2"/>
+          <p:cNvPr id="3" name="deckgen:decor"/>
           <p:cNvSpPr/>
           <p:nvPr/>
         </p:nvSpPr>
@@ -3160,7 +3160,7 @@
       </p:sp>
       <p:sp>
         <p:nvSpPr>
-          <p:cNvPr id="4" name="Oval 3"/>
+          <p:cNvPr id="4" name="deckgen:decor"/>
           <p:cNvSpPr/>
           <p:nvPr/>
         </p:nvSpPr>
@@ -3190,7 +3190,7 @@
       </p:sp>
       <p:sp>
         <p:nvSpPr>
-          <p:cNvPr id="5" name="Rectangle 4"/>
+          <p:cNvPr id="5" name="deckgen:decor"/>
           <p:cNvSpPr/>
           <p:nvPr/>
         </p:nvSpPr>
@@ -3220,7 +3220,7 @@
       </p:sp>
       <p:sp>
         <p:nvSpPr>
-          <p:cNvPr id="6" name="Oval 5"/>
+          <p:cNvPr id="6" name="deckgen:decor"/>
           <p:cNvSpPr/>
           <p:nvPr/>
         </p:nvSpPr>
@@ -3250,7 +3250,7 @@
       </p:sp>
       <p:sp>
         <p:nvSpPr>
-          <p:cNvPr id="7" name="Oval 6"/>
+          <p:cNvPr id="7" name="deckgen:decor"/>
           <p:cNvSpPr/>
           <p:nvPr/>
         </p:nvSpPr>
@@ -3280,7 +3280,7 @@
       </p:sp>
       <p:sp>
         <p:nvSpPr>
-          <p:cNvPr id="8" name="Oval 7"/>
+          <p:cNvPr id="8" name="deckgen:decor"/>
           <p:cNvSpPr/>
           <p:nvPr/>
         </p:nvSpPr>
@@ -3310,7 +3310,7 @@
       </p:sp>
       <p:sp>
         <p:nvSpPr>
-          <p:cNvPr id="9" name="Oval 8"/>
+          <p:cNvPr id="9" name="deckgen:decor"/>
           <p:cNvSpPr/>
           <p:nvPr/>
         </p:nvSpPr>
@@ -3340,7 +3340,7 @@
       </p:sp>
       <p:sp>
         <p:nvSpPr>
-          <p:cNvPr id="10" name="Rectangle 9"/>
+          <p:cNvPr id="10" name="deckgen:decor"/>
           <p:cNvSpPr/>
           <p:nvPr/>
         </p:nvSpPr>
@@ -3600,7 +3600,7 @@
       <p:grpSpPr/>
       <p:sp>
         <p:nvSpPr>
-          <p:cNvPr id="2" name="Oval 1"/>
+          <p:cNvPr id="2" name="deckgen:decor"/>
           <p:cNvSpPr/>
           <p:nvPr/>
         </p:nvSpPr>
@@ -3630,7 +3630,7 @@
       </p:sp>
       <p:sp>
         <p:nvSpPr>
-          <p:cNvPr id="3" name="Oval 2"/>
+          <p:cNvPr id="3" name="deckgen:decor"/>
           <p:cNvSpPr/>
           <p:nvPr/>
         </p:nvSpPr>
@@ -3660,7 +3660,7 @@
       </p:sp>
       <p:sp>
         <p:nvSpPr>
-          <p:cNvPr id="4" name="Oval 3"/>
+          <p:cNvPr id="4" name="deckgen:decor"/>
           <p:cNvSpPr/>
           <p:nvPr/>
         </p:nvSpPr>
@@ -3941,7 +3941,7 @@
                 <a:ea typeface="Pretendard"/>
                 <a:cs typeface="Pretendard"/>
               </a:rPr>
-              <a:t>Jobs 탭에 count() 와 show(5) 가 한 줄씩, 둘 다 Stage 1개</a:t>
+              <a:t>Jobs 탭에 1/1 과 1/1 (1 skipped) 줄이 섞여 있다</a:t>
             </a:r>
           </a:p>
         </p:txBody>
@@ -4087,7 +4087,7 @@
                 <a:ea typeface="Pretendard"/>
                 <a:cs typeface="Pretendard"/>
               </a:rPr>
-              <a:t>groupBy 잡은 Stage 2개 · explain() 에 Exchange 가 보인다</a:t>
+              <a:t>groupBy 가 Job 둘 — Task 16 / skipped + Task 1</a:t>
             </a:r>
           </a:p>
         </p:txBody>
@@ -4233,7 +4233,7 @@
                 <a:ea typeface="Pretendard"/>
                 <a:cs typeface="Pretendard"/>
               </a:rPr>
-              <a:t>Stage 의 Task 수가 앞 실습의 파티션 수와 같다</a:t>
+              <a:t>explain 에 Exchange …(…, 200), 실제 Task 는 1</a:t>
             </a:r>
           </a:p>
         </p:txBody>
@@ -4379,7 +4379,7 @@
                 <a:ea typeface="Pretendard"/>
                 <a:cs typeface="Pretendard"/>
               </a:rPr>
-              <a:t>DAG 에 박스 두 개, 사이에 선 하나</a:t>
+              <a:t>Job 8 DAG 에 회색 skipped 박스와 AQEShuffleRead</a:t>
             </a:r>
           </a:p>
         </p:txBody>
@@ -4525,7 +4525,7 @@
                 <a:ea typeface="Pretendard"/>
                 <a:cs typeface="Pretendard"/>
               </a:rPr>
-              <a:t>Executors 탭에 driver 하나뿐</a:t>
+              <a:t>Executors 탭에 driver 하나, Storage 탭에 16 · 2.8 MiB</a:t>
             </a:r>
           </a:p>
         </p:txBody>
@@ -4671,7 +4671,7 @@
                 <a:ea typeface="Pretendard"/>
                 <a:cs typeface="Pretendard"/>
               </a:rPr>
-              <a:t>캐시 뒤 세 번째 count 가 빠르고 Storage 탭에 나타난다</a:t>
+              <a:t>exit() 뒤 docker ps -a 는 제목 줄만, 4040 닫힘</a:t>
             </a:r>
           </a:p>
         </p:txBody>
@@ -4808,7 +4808,7 @@
       <p:grpSpPr/>
       <p:sp>
         <p:nvSpPr>
-          <p:cNvPr id="2" name="Oval 1"/>
+          <p:cNvPr id="2" name="deckgen:decor"/>
           <p:cNvSpPr/>
           <p:nvPr/>
         </p:nvSpPr>
@@ -4838,7 +4838,7 @@
       </p:sp>
       <p:sp>
         <p:nvSpPr>
-          <p:cNvPr id="3" name="Oval 2"/>
+          <p:cNvPr id="3" name="deckgen:decor"/>
           <p:cNvSpPr/>
           <p:nvPr/>
         </p:nvSpPr>
@@ -5246,7 +5246,7 @@
                 <a:ea typeface="Pretendard"/>
                 <a:cs typeface="Pretendard"/>
               </a:rPr>
-              <a:t>docker images | grep spark</a:t>
+              <a:t>docker images apache/spark (1.56GB)</a:t>
             </a:r>
           </a:p>
         </p:txBody>
@@ -5362,7 +5362,7 @@
                 <a:ea typeface="Pretendard"/>
                 <a:cs typeface="Pretendard"/>
               </a:rPr>
-              <a:t>Docker 메모리 4GB 이상(8GB 권장)</a:t>
+              <a:t>docker info — Total Memory 4GiB 이상</a:t>
             </a:r>
           </a:p>
         </p:txBody>
@@ -5478,7 +5478,7 @@
                 <a:ea typeface="Pretendard"/>
                 <a:cs typeface="Pretendard"/>
               </a:rPr>
-              <a:t>자주 겪는 오류 네 가지</a:t>
+              <a:t>체크리스트 · 자주 겪는 오류</a:t>
             </a:r>
           </a:p>
         </p:txBody>
@@ -5590,7 +5590,7 @@
                 <a:ea typeface="Pretendard"/>
                 <a:cs typeface="Pretendard"/>
               </a:rPr>
-              <a:t>cache 전후 시간 세 개 메모</a:t>
+              <a:t>cache 세 시간 · Cores 수 메모</a:t>
             </a:r>
           </a:p>
         </p:txBody>
@@ -5615,7 +5615,7 @@
       <p:grpSpPr/>
       <p:sp>
         <p:nvSpPr>
-          <p:cNvPr id="2" name="Oval 1"/>
+          <p:cNvPr id="2" name="deckgen:decor"/>
           <p:cNvSpPr/>
           <p:nvPr/>
         </p:nvSpPr>
@@ -5645,7 +5645,7 @@
       </p:sp>
       <p:sp>
         <p:nvSpPr>
-          <p:cNvPr id="3" name="Oval 2"/>
+          <p:cNvPr id="3" name="deckgen:decor"/>
           <p:cNvSpPr/>
           <p:nvPr/>
         </p:nvSpPr>
@@ -5675,7 +5675,7 @@
       </p:sp>
       <p:sp>
         <p:nvSpPr>
-          <p:cNvPr id="4" name="Oval 3"/>
+          <p:cNvPr id="4" name="deckgen:decor"/>
           <p:cNvSpPr/>
           <p:nvPr/>
         </p:nvSpPr>
@@ -5956,7 +5956,7 @@
                 <a:ea typeface="Pretendard"/>
                 <a:cs typeface="Pretendard"/>
               </a:rPr>
-              <a:t>Jobs 탭에서 action 마다 Job 한 줄이 생긴 것을 본다</a:t>
+              <a:t>Jobs 탭에서 Job 이 action 수보다 많은 것을 본다</a:t>
             </a:r>
           </a:p>
         </p:txBody>
@@ -6102,7 +6102,7 @@
                 <a:ea typeface="Pretendard"/>
                 <a:cs typeface="Pretendard"/>
               </a:rPr>
-              <a:t>groupBy 로 Stage 가 2개가 되는 것과 explain 의 Exchange 를 찾는다</a:t>
+              <a:t>groupBy 의 Job 둘과 explain 의 Exchange 를 찾는다</a:t>
             </a:r>
           </a:p>
         </p:txBody>
@@ -6248,7 +6248,7 @@
                 <a:ea typeface="Pretendard"/>
                 <a:cs typeface="Pretendard"/>
               </a:rPr>
-              <a:t>Stages 탭에서 Task 수 = 파티션 수를 확인한다</a:t>
+              <a:t>계획의 200 과 실제 Task 1 — AQE 가 합친 것을 확인한다</a:t>
             </a:r>
           </a:p>
         </p:txBody>
@@ -6394,7 +6394,7 @@
                 <a:ea typeface="Pretendard"/>
                 <a:cs typeface="Pretendard"/>
               </a:rPr>
-              <a:t>cache 전후의 실행 시간을 직접 잰다</a:t>
+              <a:t>cache 시간을 재 보고 Storage 탭에서 캐시를 확인한다</a:t>
             </a:r>
           </a:p>
         </p:txBody>
@@ -6606,7 +6606,7 @@
       <p:grpSpPr/>
       <p:sp>
         <p:nvSpPr>
-          <p:cNvPr id="2" name="Oval 1"/>
+          <p:cNvPr id="2" name="deckgen:decor"/>
           <p:cNvSpPr/>
           <p:nvPr/>
         </p:nvSpPr>
@@ -6636,7 +6636,7 @@
       </p:sp>
       <p:sp>
         <p:nvSpPr>
-          <p:cNvPr id="3" name="Oval 2"/>
+          <p:cNvPr id="3" name="deckgen:decor"/>
           <p:cNvSpPr/>
           <p:nvPr/>
         </p:nvSpPr>
@@ -6666,7 +6666,7 @@
       </p:sp>
       <p:sp>
         <p:nvSpPr>
-          <p:cNvPr id="4" name="Oval 3"/>
+          <p:cNvPr id="4" name="deckgen:decor"/>
           <p:cNvSpPr/>
           <p:nvPr/>
         </p:nvSpPr>
@@ -6771,7 +6771,7 @@
                 <a:ea typeface="Pretendard"/>
                 <a:cs typeface="Pretendard"/>
               </a:rPr>
-              <a:t>여섯 단계 — 탭을 하나씩 열며 계층을 읽는다</a:t>
+              <a:t>일곱 단계 — 탭을 하나씩 열며 계층을 읽는다</a:t>
             </a:r>
           </a:p>
         </p:txBody>
@@ -6842,7 +6842,7 @@
                 <a:ea typeface="Pretendard"/>
                 <a:cs typeface="Pretendard"/>
               </a:rPr>
-              <a:t>앞 실습의 셸과 localhost:4040 을 그대로 씁니다 — 상단 탭 Jobs · Stages · Storage · Environment · Executors</a:t>
+              <a:t>앞 실습의 셸과 localhost:4040 그대로 — 탭 여섯(SQL / DataFrame 포함)</a:t>
             </a:r>
           </a:p>
         </p:txBody>
@@ -6988,7 +6988,7 @@
                 <a:ea typeface="Pretendard"/>
                 <a:cs typeface="Pretendard"/>
               </a:rPr>
-              <a:t>action 마다</a:t>
+              <a:t>Job 이 action</a:t>
             </a:r>
           </a:p>
           <a:p>
@@ -7006,7 +7006,7 @@
                 <a:ea typeface="Pretendard"/>
                 <a:cs typeface="Pretendard"/>
               </a:rPr>
-              <a:t>한 줄</a:t>
+              <a:t>수보다 많다</a:t>
             </a:r>
           </a:p>
         </p:txBody>
@@ -7111,7 +7111,7 @@
                 <a:ea typeface="Pretendard"/>
                 <a:cs typeface="Pretendard"/>
               </a:rPr>
-              <a:t>2. 셔플 만들기</a:t>
+              <a:t>2·3. 셔플·Task</a:t>
             </a:r>
           </a:p>
         </p:txBody>
@@ -7152,7 +7152,7 @@
                 <a:ea typeface="Pretendard"/>
                 <a:cs typeface="Pretendard"/>
               </a:rPr>
-              <a:t>groupBy</a:t>
+              <a:t>groupBy Job 둘</a:t>
             </a:r>
           </a:p>
           <a:p>
@@ -7170,7 +7170,7 @@
                 <a:ea typeface="Pretendard"/>
                 <a:cs typeface="Pretendard"/>
               </a:rPr>
-              <a:t>Stage 2개</a:t>
+              <a:t>200 → Task 1</a:t>
             </a:r>
           </a:p>
         </p:txBody>
@@ -7275,7 +7275,7 @@
                 <a:ea typeface="Pretendard"/>
                 <a:cs typeface="Pretendard"/>
               </a:rPr>
-              <a:t>3. Stages 탭</a:t>
+              <a:t>4·5. DAG·실행자</a:t>
             </a:r>
           </a:p>
         </p:txBody>
@@ -7316,7 +7316,7 @@
                 <a:ea typeface="Pretendard"/>
                 <a:cs typeface="Pretendard"/>
               </a:rPr>
-              <a:t>Task 수</a:t>
+              <a:t>skipped 박스</a:t>
             </a:r>
           </a:p>
           <a:p>
@@ -7334,7 +7334,7 @@
                 <a:ea typeface="Pretendard"/>
                 <a:cs typeface="Pretendard"/>
               </a:rPr>
-              <a:t>= 파티션 수</a:t>
+              <a:t>driver 하나</a:t>
             </a:r>
           </a:p>
         </p:txBody>
@@ -7439,7 +7439,7 @@
                 <a:ea typeface="Pretendard"/>
                 <a:cs typeface="Pretendard"/>
               </a:rPr>
-              <a:t>4·5. DAG · 실행자</a:t>
+              <a:t>6. cache</a:t>
             </a:r>
           </a:p>
         </p:txBody>
@@ -7480,7 +7480,7 @@
                 <a:ea typeface="Pretendard"/>
                 <a:cs typeface="Pretendard"/>
               </a:rPr>
-              <a:t>박스와 선</a:t>
+              <a:t>count 세 번</a:t>
             </a:r>
           </a:p>
           <a:p>
@@ -7498,7 +7498,7 @@
                 <a:ea typeface="Pretendard"/>
                 <a:cs typeface="Pretendard"/>
               </a:rPr>
-              <a:t>driver 하나</a:t>
+              <a:t>Storage 탭</a:t>
             </a:r>
           </a:p>
         </p:txBody>
@@ -7603,7 +7603,7 @@
                 <a:ea typeface="Pretendard"/>
                 <a:cs typeface="Pretendard"/>
               </a:rPr>
-              <a:t>6. cache</a:t>
+              <a:t>7. 실패·나가기</a:t>
             </a:r>
           </a:p>
         </p:txBody>
@@ -7644,7 +7644,7 @@
                 <a:ea typeface="Pretendard"/>
                 <a:cs typeface="Pretendard"/>
               </a:rPr>
-              <a:t>count 세 번</a:t>
+              <a:t>4040 겹침</a:t>
             </a:r>
           </a:p>
           <a:p>
@@ -7662,7 +7662,7 @@
                 <a:ea typeface="Pretendard"/>
                 <a:cs typeface="Pretendard"/>
               </a:rPr>
-              <a:t>시간 비교</a:t>
+              <a:t>exit()</a:t>
             </a:r>
           </a:p>
         </p:txBody>
@@ -7799,7 +7799,7 @@
       <p:grpSpPr/>
       <p:sp>
         <p:nvSpPr>
-          <p:cNvPr id="2" name="Oval 1"/>
+          <p:cNvPr id="2" name="deckgen:decor"/>
           <p:cNvSpPr/>
           <p:nvPr/>
         </p:nvSpPr>
@@ -7829,7 +7829,7 @@
       </p:sp>
       <p:sp>
         <p:nvSpPr>
-          <p:cNvPr id="3" name="Oval 2"/>
+          <p:cNvPr id="3" name="deckgen:decor"/>
           <p:cNvSpPr/>
           <p:nvPr/>
         </p:nvSpPr>
@@ -7859,7 +7859,7 @@
       </p:sp>
       <p:sp>
         <p:nvSpPr>
-          <p:cNvPr id="4" name="Oval 3"/>
+          <p:cNvPr id="4" name="deckgen:decor"/>
           <p:cNvSpPr/>
           <p:nvPr/>
         </p:nvSpPr>
@@ -7964,7 +7964,7 @@
                 <a:ea typeface="Pretendard"/>
                 <a:cs typeface="Pretendard"/>
               </a:rPr>
-              <a:t>Jobs 탭 — action 마다 한 줄</a:t>
+              <a:t>Jobs 탭 — action 하나가 Job 여럿</a:t>
             </a:r>
           </a:p>
         </p:txBody>
@@ -8008,7 +8008,7 @@
         <p:spPr>
           <a:xfrm>
             <a:off x="1143000" y="2781300"/>
-            <a:ext cx="4762500" cy="590550"/>
+            <a:ext cx="5562600" cy="590550"/>
           </a:xfrm>
           <a:prstGeom prst="rect">
             <a:avLst/>
@@ -8038,7 +8038,7 @@
         <p:spPr>
           <a:xfrm>
             <a:off x="1143000" y="2781300"/>
-            <a:ext cx="4762500" cy="590550"/>
+            <a:ext cx="5562600" cy="590550"/>
           </a:xfrm>
           <a:prstGeom prst="rect">
             <a:avLst/>
@@ -8078,8 +8078,8 @@
         </p:nvSpPr>
         <p:spPr>
           <a:xfrm>
-            <a:off x="5943600" y="2781300"/>
-            <a:ext cx="11201400" cy="590550"/>
+            <a:off x="6743700" y="2781300"/>
+            <a:ext cx="10401300" cy="590550"/>
           </a:xfrm>
           <a:prstGeom prst="rect">
             <a:avLst/>
@@ -8108,8 +8108,8 @@
         </p:nvSpPr>
         <p:spPr>
           <a:xfrm>
-            <a:off x="5943600" y="2781300"/>
-            <a:ext cx="11201400" cy="590550"/>
+            <a:off x="6743700" y="2781300"/>
+            <a:ext cx="10401300" cy="590550"/>
           </a:xfrm>
           <a:prstGeom prst="rect">
             <a:avLst/>
@@ -8150,7 +8150,7 @@
         <p:spPr>
           <a:xfrm>
             <a:off x="1143000" y="3448050"/>
-            <a:ext cx="4762500" cy="647700"/>
+            <a:ext cx="5562600" cy="647700"/>
           </a:xfrm>
           <a:prstGeom prst="roundRect">
             <a:avLst>
@@ -8184,7 +8184,7 @@
         <p:spPr>
           <a:xfrm>
             <a:off x="1238250" y="3448050"/>
-            <a:ext cx="4572000" cy="647700"/>
+            <a:ext cx="5372100" cy="647700"/>
           </a:xfrm>
           <a:prstGeom prst="rect">
             <a:avLst/>
@@ -8211,7 +8211,7 @@
                 <a:ea typeface="Pretendard"/>
                 <a:cs typeface="Pretendard"/>
               </a:rPr>
-              <a:t>한 줄</a:t>
+              <a:t>Description</a:t>
             </a:r>
           </a:p>
         </p:txBody>
@@ -8224,8 +8224,8 @@
         </p:nvSpPr>
         <p:spPr>
           <a:xfrm>
-            <a:off x="5943600" y="3448050"/>
-            <a:ext cx="11201400" cy="647700"/>
+            <a:off x="6743700" y="3448050"/>
+            <a:ext cx="10401300" cy="647700"/>
           </a:xfrm>
           <a:prstGeom prst="roundRect">
             <a:avLst>
@@ -8258,8 +8258,8 @@
         </p:nvSpPr>
         <p:spPr>
           <a:xfrm>
-            <a:off x="6038850" y="3448050"/>
-            <a:ext cx="11010900" cy="647700"/>
+            <a:off x="6838950" y="3448050"/>
+            <a:ext cx="10210800" cy="647700"/>
           </a:xfrm>
           <a:prstGeom prst="rect">
             <a:avLst/>
@@ -8286,7 +8286,7 @@
                 <a:ea typeface="Pretendard"/>
                 <a:cs typeface="Pretendard"/>
               </a:rPr>
-              <a:t>지금까지 실행한 action 하나</a:t>
+              <a:t>count at … · showString at …</a:t>
             </a:r>
           </a:p>
         </p:txBody>
@@ -8300,7 +8300,7 @@
         <p:spPr>
           <a:xfrm>
             <a:off x="1143000" y="4171950"/>
-            <a:ext cx="4762500" cy="647700"/>
+            <a:ext cx="5562600" cy="647700"/>
           </a:xfrm>
           <a:prstGeom prst="roundRect">
             <a:avLst>
@@ -8334,7 +8334,7 @@
         <p:spPr>
           <a:xfrm>
             <a:off x="1238250" y="4171950"/>
-            <a:ext cx="4572000" cy="647700"/>
+            <a:ext cx="5372100" cy="647700"/>
           </a:xfrm>
           <a:prstGeom prst="rect">
             <a:avLst/>
@@ -8374,8 +8374,8 @@
         </p:nvSpPr>
         <p:spPr>
           <a:xfrm>
-            <a:off x="5943600" y="4171950"/>
-            <a:ext cx="11201400" cy="647700"/>
+            <a:off x="6743700" y="4171950"/>
+            <a:ext cx="10401300" cy="647700"/>
           </a:xfrm>
           <a:prstGeom prst="roundRect">
             <a:avLst>
@@ -8408,8 +8408,8 @@
         </p:nvSpPr>
         <p:spPr>
           <a:xfrm>
-            <a:off x="6038850" y="4171950"/>
-            <a:ext cx="11010900" cy="647700"/>
+            <a:off x="6838950" y="4171950"/>
+            <a:ext cx="10210800" cy="647700"/>
           </a:xfrm>
           <a:prstGeom prst="rect">
             <a:avLst/>
@@ -8450,7 +8450,7 @@
         <p:spPr>
           <a:xfrm>
             <a:off x="1143000" y="4895850"/>
-            <a:ext cx="4762500" cy="647700"/>
+            <a:ext cx="5562600" cy="647700"/>
           </a:xfrm>
           <a:prstGeom prst="roundRect">
             <a:avLst>
@@ -8484,7 +8484,7 @@
         <p:spPr>
           <a:xfrm>
             <a:off x="1238250" y="4895850"/>
-            <a:ext cx="4572000" cy="647700"/>
+            <a:ext cx="5372100" cy="647700"/>
           </a:xfrm>
           <a:prstGeom prst="rect">
             <a:avLst/>
@@ -8511,7 +8511,7 @@
                 <a:ea typeface="Pretendard"/>
                 <a:cs typeface="Pretendard"/>
               </a:rPr>
-              <a:t>Stages</a:t>
+              <a:t>Stages 1/1</a:t>
             </a:r>
           </a:p>
         </p:txBody>
@@ -8524,8 +8524,8 @@
         </p:nvSpPr>
         <p:spPr>
           <a:xfrm>
-            <a:off x="5943600" y="4895850"/>
-            <a:ext cx="11201400" cy="647700"/>
+            <a:off x="6743700" y="4895850"/>
+            <a:ext cx="10401300" cy="647700"/>
           </a:xfrm>
           <a:prstGeom prst="roundRect">
             <a:avLst>
@@ -8558,8 +8558,8 @@
         </p:nvSpPr>
         <p:spPr>
           <a:xfrm>
-            <a:off x="6038850" y="4895850"/>
-            <a:ext cx="11010900" cy="647700"/>
+            <a:off x="6838950" y="4895850"/>
+            <a:ext cx="10210800" cy="647700"/>
           </a:xfrm>
           <a:prstGeom prst="rect">
             <a:avLst/>
@@ -8586,7 +8586,7 @@
                 <a:ea typeface="Pretendard"/>
                 <a:cs typeface="Pretendard"/>
               </a:rPr>
-              <a:t>그 Job 이 몇 단계로 나뉘었는지</a:t>
+              <a:t>단계 하나를 실행</a:t>
             </a:r>
           </a:p>
         </p:txBody>
@@ -8600,7 +8600,7 @@
         <p:spPr>
           <a:xfrm>
             <a:off x="1143000" y="5619750"/>
-            <a:ext cx="4762500" cy="647700"/>
+            <a:ext cx="5562600" cy="647700"/>
           </a:xfrm>
           <a:prstGeom prst="roundRect">
             <a:avLst>
@@ -8634,7 +8634,7 @@
         <p:spPr>
           <a:xfrm>
             <a:off x="1238250" y="5619750"/>
-            <a:ext cx="4572000" cy="647700"/>
+            <a:ext cx="5372100" cy="647700"/>
           </a:xfrm>
           <a:prstGeom prst="rect">
             <a:avLst/>
@@ -8661,7 +8661,7 @@
                 <a:ea typeface="Pretendard"/>
                 <a:cs typeface="Pretendard"/>
               </a:rPr>
-              <a:t>Job 클릭</a:t>
+              <a:t>1/1 (1 skipped)</a:t>
             </a:r>
           </a:p>
         </p:txBody>
@@ -8674,8 +8674,8 @@
         </p:nvSpPr>
         <p:spPr>
           <a:xfrm>
-            <a:off x="5943600" y="5619750"/>
-            <a:ext cx="11201400" cy="647700"/>
+            <a:off x="6743700" y="5619750"/>
+            <a:ext cx="10401300" cy="647700"/>
           </a:xfrm>
           <a:prstGeom prst="roundRect">
             <a:avLst>
@@ -8708,8 +8708,8 @@
         </p:nvSpPr>
         <p:spPr>
           <a:xfrm>
-            <a:off x="6038850" y="5619750"/>
-            <a:ext cx="11010900" cy="647700"/>
+            <a:off x="6838950" y="5619750"/>
+            <a:ext cx="10210800" cy="647700"/>
           </a:xfrm>
           <a:prstGeom prst="rect">
             <a:avLst/>
@@ -8736,6 +8736,156 @@
                 <a:ea typeface="Pretendard"/>
                 <a:cs typeface="Pretendard"/>
               </a:rPr>
+              <a:t>앞 Job 이 해 둔 단계를 건너뜀</a:t>
+            </a:r>
+          </a:p>
+        </p:txBody>
+      </p:sp>
+      <p:sp>
+        <p:nvSpPr>
+          <p:cNvPr id="28" name="Rounded Rectangle 27"/>
+          <p:cNvSpPr/>
+          <p:nvPr/>
+        </p:nvSpPr>
+        <p:spPr>
+          <a:xfrm>
+            <a:off x="1143000" y="6343650"/>
+            <a:ext cx="5562600" cy="647700"/>
+          </a:xfrm>
+          <a:prstGeom prst="roundRect">
+            <a:avLst>
+              <a:gd name="adj" fmla="val 5882"/>
+            </a:avLst>
+          </a:prstGeom>
+          <a:solidFill>
+            <a:srgbClr val="EDF3FD"/>
+          </a:solidFill>
+          <a:ln w="9525">
+            <a:solidFill>
+              <a:srgbClr val="BFD3F5"/>
+            </a:solidFill>
+          </a:ln>
+          <a:effectLst/>
+        </p:spPr>
+        <p:txBody>
+          <a:bodyPr rtlCol="0" anchor="ctr" wrap="square"/>
+          <a:lstStyle/>
+          <a:p>
+            <a:pPr algn="ctr"/>
+          </a:p>
+        </p:txBody>
+      </p:sp>
+      <p:sp>
+        <p:nvSpPr>
+          <p:cNvPr id="29" name="TextBox 28"/>
+          <p:cNvSpPr txBox="1"/>
+          <p:nvPr/>
+        </p:nvSpPr>
+        <p:spPr>
+          <a:xfrm>
+            <a:off x="1238250" y="6343650"/>
+            <a:ext cx="5372100" cy="647700"/>
+          </a:xfrm>
+          <a:prstGeom prst="rect">
+            <a:avLst/>
+          </a:prstGeom>
+          <a:noFill/>
+        </p:spPr>
+        <p:txBody>
+          <a:bodyPr wrap="square" lIns="0" rIns="0" tIns="0" bIns="0" anchor="ctr">
+            <a:spAutoFit/>
+          </a:bodyPr>
+          <a:lstStyle/>
+          <a:p>
+            <a:pPr algn="l">
+              <a:lnSpc>
+                <a:spcPct val="115000"/>
+              </a:lnSpc>
+            </a:pPr>
+            <a:r>
+              <a:rPr sz="1875" b="1">
+                <a:solidFill>
+                  <a:srgbClr val="0D2B5E"/>
+                </a:solidFill>
+                <a:latin typeface="Pretendard"/>
+                <a:ea typeface="Pretendard"/>
+                <a:cs typeface="Pretendard"/>
+              </a:rPr>
+              <a:t>Job 클릭</a:t>
+            </a:r>
+          </a:p>
+        </p:txBody>
+      </p:sp>
+      <p:sp>
+        <p:nvSpPr>
+          <p:cNvPr id="30" name="Rounded Rectangle 29"/>
+          <p:cNvSpPr/>
+          <p:nvPr/>
+        </p:nvSpPr>
+        <p:spPr>
+          <a:xfrm>
+            <a:off x="6743700" y="6343650"/>
+            <a:ext cx="10401300" cy="647700"/>
+          </a:xfrm>
+          <a:prstGeom prst="roundRect">
+            <a:avLst>
+              <a:gd name="adj" fmla="val 5882"/>
+            </a:avLst>
+          </a:prstGeom>
+          <a:solidFill>
+            <a:srgbClr val="FAFBFD"/>
+          </a:solidFill>
+          <a:ln w="9525">
+            <a:solidFill>
+              <a:srgbClr val="DCE1E8"/>
+            </a:solidFill>
+          </a:ln>
+          <a:effectLst/>
+        </p:spPr>
+        <p:txBody>
+          <a:bodyPr rtlCol="0" anchor="ctr" wrap="square"/>
+          <a:lstStyle/>
+          <a:p>
+            <a:pPr algn="ctr"/>
+          </a:p>
+        </p:txBody>
+      </p:sp>
+      <p:sp>
+        <p:nvSpPr>
+          <p:cNvPr id="31" name="TextBox 30"/>
+          <p:cNvSpPr txBox="1"/>
+          <p:nvPr/>
+        </p:nvSpPr>
+        <p:spPr>
+          <a:xfrm>
+            <a:off x="6838950" y="6343650"/>
+            <a:ext cx="10210800" cy="647700"/>
+          </a:xfrm>
+          <a:prstGeom prst="rect">
+            <a:avLst/>
+          </a:prstGeom>
+          <a:noFill/>
+        </p:spPr>
+        <p:txBody>
+          <a:bodyPr wrap="square" lIns="0" rIns="0" tIns="0" bIns="0" anchor="ctr">
+            <a:spAutoFit/>
+          </a:bodyPr>
+          <a:lstStyle/>
+          <a:p>
+            <a:pPr algn="ctr">
+              <a:lnSpc>
+                <a:spcPct val="115000"/>
+              </a:lnSpc>
+            </a:pPr>
+            <a:r>
+              <a:rPr sz="1875" b="0">
+                <a:solidFill>
+                  <a:srgbClr val="3D3D3D"/>
+                </a:solidFill>
+                <a:latin typeface="Pretendard"/>
+                <a:ea typeface="Pretendard"/>
+                <a:cs typeface="Pretendard"/>
+              </a:rPr>
               <a:t>Stage 목록 + DAG Visualization</a:t>
             </a:r>
           </a:p>
@@ -8743,7 +8893,7 @@
       </p:sp>
       <p:sp>
         <p:nvSpPr>
-          <p:cNvPr id="28" name="TextBox 27"/>
+          <p:cNvPr id="32" name="TextBox 31"/>
           <p:cNvSpPr txBox="1"/>
           <p:nvPr/>
         </p:nvSpPr>
@@ -8777,14 +8927,14 @@
                 <a:ea typeface="Pretendard"/>
                 <a:cs typeface="Pretendard"/>
               </a:rPr>
-              <a:t>확인: 앞 실습의 count() 와 show(5) 가 한 줄씩 · 둘 다 Stage 1개 — 셔플이 없었기 때문</a:t>
-            </a:r>
-          </a:p>
-        </p:txBody>
-      </p:sp>
-      <p:sp>
-        <p:nvSpPr>
-          <p:cNvPr id="29" name="Rectangle 28"/>
+              <a:t>확인: count() 가 Job 0 · 1, show(5) 가 Job 2 · 3 · 4 — 파티션별 개수 세기까지 일곱 줄 안팎</a:t>
+            </a:r>
+          </a:p>
+        </p:txBody>
+      </p:sp>
+      <p:sp>
+        <p:nvSpPr>
+          <p:cNvPr id="33" name="Rectangle 32"/>
           <p:cNvSpPr/>
           <p:nvPr/>
         </p:nvSpPr>
@@ -8814,7 +8964,7 @@
       </p:sp>
       <p:sp>
         <p:nvSpPr>
-          <p:cNvPr id="30" name="TextBox 29"/>
+          <p:cNvPr id="34" name="TextBox 33"/>
           <p:cNvSpPr txBox="1"/>
           <p:nvPr/>
         </p:nvSpPr>
@@ -8855,7 +9005,7 @@
       </p:sp>
       <p:sp>
         <p:nvSpPr>
-          <p:cNvPr id="31" name="TextBox 30"/>
+          <p:cNvPr id="35" name="TextBox 34"/>
           <p:cNvSpPr txBox="1"/>
           <p:nvPr/>
         </p:nvSpPr>
@@ -8914,7 +9064,7 @@
       <p:grpSpPr/>
       <p:sp>
         <p:nvSpPr>
-          <p:cNvPr id="2" name="Oval 1"/>
+          <p:cNvPr id="2" name="deckgen:decor"/>
           <p:cNvSpPr/>
           <p:nvPr/>
         </p:nvSpPr>
@@ -8944,7 +9094,7 @@
       </p:sp>
       <p:sp>
         <p:nvSpPr>
-          <p:cNvPr id="3" name="Oval 2"/>
+          <p:cNvPr id="3" name="deckgen:decor"/>
           <p:cNvSpPr/>
           <p:nvPr/>
         </p:nvSpPr>
@@ -8974,7 +9124,7 @@
       </p:sp>
       <p:sp>
         <p:nvSpPr>
-          <p:cNvPr id="4" name="Oval 3"/>
+          <p:cNvPr id="4" name="deckgen:decor"/>
           <p:cNvSpPr/>
           <p:nvPr/>
         </p:nvSpPr>
@@ -9079,7 +9229,7 @@
                 <a:ea typeface="Pretendard"/>
                 <a:cs typeface="Pretendard"/>
               </a:rPr>
-              <a:t>groupBy 로 셔플을 만들어 Stage 를 늘린다</a:t>
+              <a:t>groupBy 로 셔플을 만들면 Job 이 둘 늘어난다</a:t>
             </a:r>
           </a:p>
         </p:txBody>
@@ -9191,7 +9341,7 @@
                 <a:ea typeface="Pretendard"/>
                 <a:cs typeface="Pretendard"/>
               </a:rPr>
-              <a:t>같은 키를 모아야 하므로 노드 간 재배치 = 셔플</a:t>
+              <a:t>결과 bucket 0~9 가 100000 씩(순서는 섞임)</a:t>
             </a:r>
           </a:p>
         </p:txBody>
@@ -9764,7 +9914,7 @@
                 <a:ea typeface="Pretendard"/>
                 <a:cs typeface="Pretendard"/>
               </a:rPr>
-              <a:t>UI 와 explain()</a:t>
+              <a:t>Jobs 탭과 explain()</a:t>
             </a:r>
           </a:p>
         </p:txBody>
@@ -9805,7 +9955,7 @@
                 <a:ea typeface="Pretendard"/>
                 <a:cs typeface="Pretendard"/>
               </a:rPr>
-              <a:t>Job 을 클릭하면 Stage 가 2개 · 계획에 Exchange</a:t>
+              <a:t>「나누기」와 「모아서 세기」 사이가 셔플</a:t>
             </a:r>
           </a:p>
         </p:txBody>
@@ -9910,7 +10060,7 @@
                 <a:ea typeface="Pretendard"/>
                 <a:cs typeface="Pretendard"/>
               </a:rPr>
-              <a:t>Stage 0 — 읽고 나누는 단계</a:t>
+              <a:t>Job 7 — Stage 하나, Task 16</a:t>
             </a:r>
           </a:p>
         </p:txBody>
@@ -9981,7 +10131,7 @@
                 <a:ea typeface="Pretendard"/>
                 <a:cs typeface="Pretendard"/>
               </a:rPr>
-              <a:t>Stage 1 — 모아서 세는 단계</a:t>
+              <a:t>Job 8 — 1/1 (1 skipped), Task 1</a:t>
             </a:r>
           </a:p>
         </p:txBody>
@@ -10052,7 +10202,7 @@
                 <a:ea typeface="Pretendard"/>
                 <a:cs typeface="Pretendard"/>
               </a:rPr>
-              <a:t>그 사이가 셔플</a:t>
+              <a:t>Exchange hashpartitioning(…, 200)</a:t>
             </a:r>
           </a:p>
         </p:txBody>
@@ -10123,7 +10273,7 @@
                 <a:ea typeface="Pretendard"/>
                 <a:cs typeface="Pretendard"/>
               </a:rPr>
-              <a:t>Exchange hashpartitioning(…) = 셔플</a:t>
+              <a:t>Exchange = 셔플 · 맨 위 AdaptiveSparkPlan</a:t>
             </a:r>
           </a:p>
         </p:txBody>
@@ -10331,7 +10481,7 @@
       <p:grpSpPr/>
       <p:sp>
         <p:nvSpPr>
-          <p:cNvPr id="2" name="Oval 1"/>
+          <p:cNvPr id="2" name="deckgen:decor"/>
           <p:cNvSpPr/>
           <p:nvPr/>
         </p:nvSpPr>
@@ -10361,7 +10511,7 @@
       </p:sp>
       <p:sp>
         <p:nvSpPr>
-          <p:cNvPr id="3" name="Oval 2"/>
+          <p:cNvPr id="3" name="deckgen:decor"/>
           <p:cNvSpPr/>
           <p:nvPr/>
         </p:nvSpPr>
@@ -10391,7 +10541,7 @@
       </p:sp>
       <p:sp>
         <p:nvSpPr>
-          <p:cNvPr id="4" name="Oval 3"/>
+          <p:cNvPr id="4" name="deckgen:decor"/>
           <p:cNvSpPr/>
           <p:nvPr/>
         </p:nvSpPr>
@@ -10496,7 +10646,7 @@
                 <a:ea typeface="Pretendard"/>
                 <a:cs typeface="Pretendard"/>
               </a:rPr>
-              <a:t>Stages 탭에서 Task 를 본다</a:t>
+              <a:t>Stages 탭 — 계획은 200, 실제 Task 는 1</a:t>
             </a:r>
           </a:p>
         </p:txBody>
@@ -10672,7 +10822,7 @@
                 <a:ea typeface="Pretendard"/>
                 <a:cs typeface="Pretendard"/>
               </a:rPr>
-              <a:t>Stages 탭 → 방금 실행한 Stage 클릭</a:t>
+              <a:t>Stage 9 (Job 7) — Task 16</a:t>
             </a:r>
           </a:p>
         </p:txBody>
@@ -10713,7 +10863,7 @@
                 <a:ea typeface="Pretendard"/>
                 <a:cs typeface="Pretendard"/>
               </a:rPr>
-              <a:t>Tasks 표에 Task 하나당 한 줄 — 파티션 하나가 Task 하나</a:t>
+              <a:t>파티션 수와 같다 · 파티션마다 62500 행을 읽어 나눈다</a:t>
             </a:r>
           </a:p>
         </p:txBody>
@@ -10859,7 +11009,7 @@
                 <a:ea typeface="Pretendard"/>
                 <a:cs typeface="Pretendard"/>
               </a:rPr>
-              <a:t>Duration 이 Task 마다 다르다</a:t>
+              <a:t>Stage 11 (Job 8) — Task 1</a:t>
             </a:r>
           </a:p>
         </p:txBody>
@@ -10900,7 +11050,7 @@
                 <a:ea typeface="Pretendard"/>
                 <a:cs typeface="Pretendard"/>
               </a:rPr>
-              <a:t>한 Task 만 유난히 오래 걸리면 데이터가 한쪽에 몰린 것(스큐)</a:t>
+              <a:t>계획은 200(셔플 파티션 기본값) — AQE 가 실행 중에 합쳤다</a:t>
             </a:r>
           </a:p>
         </p:txBody>
@@ -11046,7 +11196,7 @@
                 <a:ea typeface="Pretendard"/>
                 <a:cs typeface="Pretendard"/>
               </a:rPr>
-              <a:t>Summary Metrics 의 Min · Median · Max</a:t>
+              <a:t>Duration 열</a:t>
             </a:r>
           </a:p>
         </p:txBody>
@@ -11087,7 +11237,7 @@
                 <a:ea typeface="Pretendard"/>
                 <a:cs typeface="Pretendard"/>
               </a:rPr>
-              <a:t>비교하면 치우침이 한눈에 보인다</a:t>
+              <a:t>한 Task 만 유난히 오래 걸리면 데이터가 한쪽에 몰린 것(스큐)</a:t>
             </a:r>
           </a:p>
         </p:txBody>
@@ -11233,7 +11383,7 @@
                 <a:ea typeface="Pretendard"/>
                 <a:cs typeface="Pretendard"/>
               </a:rPr>
-              <a:t>Stage 1 의 Task 수는 200 인 경우가 많다</a:t>
+              <a:t>Summary Metrics 의 Min · Median · Max</a:t>
             </a:r>
           </a:p>
         </p:txBody>
@@ -11274,7 +11424,7 @@
                 <a:ea typeface="Pretendard"/>
                 <a:cs typeface="Pretendard"/>
               </a:rPr>
-              <a:t>기본 셔플 파티션 수 — 데이터가 작은데 200개면 과하다, 5-5 에서 조절</a:t>
+              <a:t>비교하면 치우침이 한눈에 보인다</a:t>
             </a:r>
           </a:p>
         </p:txBody>
@@ -11349,7 +11499,7 @@
                 <a:ea typeface="Pretendard"/>
                 <a:cs typeface="Pretendard"/>
               </a:rPr>
-              <a:t>확인할 것</a:t>
+              <a:t>요점</a:t>
             </a:r>
           </a:p>
         </p:txBody>
@@ -11390,7 +11540,7 @@
                 <a:ea typeface="Pretendard"/>
                 <a:cs typeface="Pretendard"/>
               </a:rPr>
-              <a:t>Task 수 =</a:t>
+              <a:t>계획과 실제는</a:t>
             </a:r>
           </a:p>
           <a:p>
@@ -11408,7 +11558,7 @@
                 <a:ea typeface="Pretendard"/>
                 <a:cs typeface="Pretendard"/>
               </a:rPr>
-              <a:t>파티션 수</a:t>
+              <a:t>다를 수 있다</a:t>
             </a:r>
           </a:p>
         </p:txBody>
@@ -11545,7 +11695,7 @@
       <p:grpSpPr/>
       <p:sp>
         <p:nvSpPr>
-          <p:cNvPr id="2" name="Oval 1"/>
+          <p:cNvPr id="2" name="deckgen:decor"/>
           <p:cNvSpPr/>
           <p:nvPr/>
         </p:nvSpPr>
@@ -11575,7 +11725,7 @@
       </p:sp>
       <p:sp>
         <p:nvSpPr>
-          <p:cNvPr id="3" name="Oval 2"/>
+          <p:cNvPr id="3" name="deckgen:decor"/>
           <p:cNvSpPr/>
           <p:nvPr/>
         </p:nvSpPr>
@@ -11605,7 +11755,7 @@
       </p:sp>
       <p:sp>
         <p:nvSpPr>
-          <p:cNvPr id="4" name="Oval 3"/>
+          <p:cNvPr id="4" name="deckgen:decor"/>
           <p:cNvSpPr/>
           <p:nvPr/>
         </p:nvSpPr>
@@ -11811,7 +11961,7 @@
                 <a:ea typeface="Pretendard"/>
                 <a:cs typeface="Pretendard"/>
               </a:rPr>
-              <a:t>박스</a:t>
+              <a:t>Job 7</a:t>
             </a:r>
           </a:p>
         </p:txBody>
@@ -11886,7 +12036,25 @@
                 <a:ea typeface="Pretendard"/>
                 <a:cs typeface="Pretendard"/>
               </a:rPr>
-              <a:t>Stage 하나</a:t>
+              <a:t>Stage 9 하나</a:t>
+            </a:r>
+          </a:p>
+          <a:p>
+            <a:pPr algn="ctr">
+              <a:lnSpc>
+                <a:spcPct val="135000"/>
+              </a:lnSpc>
+            </a:pPr>
+            <a:r>
+              <a:rPr sz="1800" b="0">
+                <a:solidFill>
+                  <a:srgbClr val="3D3D3D"/>
+                </a:solidFill>
+                <a:latin typeface="Pretendard"/>
+                <a:ea typeface="Pretendard"/>
+                <a:cs typeface="Pretendard"/>
+              </a:rPr>
+              <a:t>끝이 Exchange</a:t>
             </a:r>
           </a:p>
         </p:txBody>
@@ -11987,7 +12155,7 @@
                 <a:ea typeface="Pretendard"/>
                 <a:cs typeface="Pretendard"/>
               </a:rPr>
-              <a:t>박스 안 상자</a:t>
+              <a:t>Job 8 · Stage 10</a:t>
             </a:r>
           </a:p>
         </p:txBody>
@@ -12062,7 +12230,25 @@
                 <a:ea typeface="Pretendard"/>
                 <a:cs typeface="Pretendard"/>
               </a:rPr>
-              <a:t>연산 하나</a:t>
+              <a:t>skipped · 회색</a:t>
+            </a:r>
+          </a:p>
+          <a:p>
+            <a:pPr algn="ctr">
+              <a:lnSpc>
+                <a:spcPct val="135000"/>
+              </a:lnSpc>
+            </a:pPr>
+            <a:r>
+              <a:rPr sz="1800" b="0">
+                <a:solidFill>
+                  <a:srgbClr val="3D3D3D"/>
+                </a:solidFill>
+                <a:latin typeface="Pretendard"/>
+                <a:ea typeface="Pretendard"/>
+                <a:cs typeface="Pretendard"/>
+              </a:rPr>
+              <a:t>끝에 Exchange</a:t>
             </a:r>
           </a:p>
         </p:txBody>
@@ -12163,7 +12349,7 @@
                 <a:ea typeface="Pretendard"/>
                 <a:cs typeface="Pretendard"/>
               </a:rPr>
-              <a:t>Stage 사이 선</a:t>
+              <a:t>사이의 선</a:t>
             </a:r>
           </a:p>
         </p:txBody>
@@ -12339,7 +12525,7 @@
                 <a:ea typeface="Pretendard"/>
                 <a:cs typeface="Pretendard"/>
               </a:rPr>
-              <a:t>위 → 아래</a:t>
+              <a:t>Stage 11</a:t>
             </a:r>
           </a:p>
         </p:txBody>
@@ -12414,7 +12600,7 @@
                 <a:ea typeface="Pretendard"/>
                 <a:cs typeface="Pretendard"/>
               </a:rPr>
-              <a:t>데이터 흐름</a:t>
+              <a:t>AQEShuffleRead</a:t>
             </a:r>
           </a:p>
           <a:p>
@@ -12432,7 +12618,7 @@
                 <a:ea typeface="Pretendard"/>
                 <a:cs typeface="Pretendard"/>
               </a:rPr>
-              <a:t>방향으로 읽기</a:t>
+              <a:t>로 시작</a:t>
             </a:r>
           </a:p>
         </p:txBody>
@@ -12507,7 +12693,7 @@
                 <a:ea typeface="Pretendard"/>
                 <a:cs typeface="Pretendard"/>
               </a:rPr>
-              <a:t>groupBy 잡: 박스 두 개, 사이에 선 하나 — 이론 챕터의 도해와 같은 구조</a:t>
+              <a:t>박스 안 상자가 연산 · 위에서 아래로 읽기 — 이론 챕터의 도해와 같은 구조</a:t>
             </a:r>
           </a:p>
         </p:txBody>
@@ -12548,7 +12734,7 @@
                 <a:ea typeface="Pretendard"/>
                 <a:cs typeface="Pretendard"/>
               </a:rPr>
-              <a:t>5단계 Executors 탭: driver 하나만 — local 모드는 드라이버가 익스큐터 역할까지 겸한다 · Cores · Memory · Task Time 열을 봐 두기</a:t>
+              <a:t>5단계 Executors 탭: driver 하나 · Cores 16(Docker 에 준 CPU 수 — 사람마다 다름) — 5-2 에서 워커가 줄줄이</a:t>
             </a:r>
           </a:p>
         </p:txBody>
@@ -12685,7 +12871,7 @@
       <p:grpSpPr/>
       <p:sp>
         <p:nvSpPr>
-          <p:cNvPr id="2" name="Oval 1"/>
+          <p:cNvPr id="2" name="deckgen:decor"/>
           <p:cNvSpPr/>
           <p:nvPr/>
         </p:nvSpPr>
@@ -12715,7 +12901,7 @@
       </p:sp>
       <p:sp>
         <p:nvSpPr>
-          <p:cNvPr id="3" name="Oval 2"/>
+          <p:cNvPr id="3" name="deckgen:decor"/>
           <p:cNvSpPr/>
           <p:nvPr/>
         </p:nvSpPr>
@@ -12745,7 +12931,7 @@
       </p:sp>
       <p:sp>
         <p:nvSpPr>
-          <p:cNvPr id="4" name="Oval 3"/>
+          <p:cNvPr id="4" name="deckgen:decor"/>
           <p:cNvSpPr/>
           <p:nvPr/>
         </p:nvSpPr>
@@ -12850,7 +13036,7 @@
                 <a:ea typeface="Pretendard"/>
                 <a:cs typeface="Pretendard"/>
               </a:rPr>
-              <a:t>cache 의 효과를 재 본다 — count 세 번</a:t>
+              <a:t>cache — 시간 차이는 작다, Storage 탭을 본다</a:t>
             </a:r>
           </a:p>
         </p:txBody>
@@ -12894,7 +13080,7 @@
         <p:spPr>
           <a:xfrm>
             <a:off x="1143000" y="2781300"/>
-            <a:ext cx="2009358" cy="571500"/>
+            <a:ext cx="6362700" cy="590550"/>
           </a:xfrm>
           <a:prstGeom prst="rect">
             <a:avLst/>
@@ -12924,7 +13110,7 @@
         <p:spPr>
           <a:xfrm>
             <a:off x="1143000" y="2781300"/>
-            <a:ext cx="2009358" cy="571500"/>
+            <a:ext cx="6362700" cy="590550"/>
           </a:xfrm>
           <a:prstGeom prst="rect">
             <a:avLst/>
@@ -12943,7 +13129,7 @@
               </a:lnSpc>
             </a:pPr>
             <a:r>
-              <a:rPr sz="1800" b="1">
+              <a:rPr sz="2025" b="1">
                 <a:solidFill>
                   <a:srgbClr val="FFFFFF"/>
                 </a:solidFill>
@@ -12951,7 +13137,7 @@
                 <a:ea typeface="Pretendard"/>
                 <a:cs typeface="Pretendard"/>
               </a:rPr>
-              <a:t>big</a:t>
+              <a:t>확인</a:t>
             </a:r>
           </a:p>
         </p:txBody>
@@ -12964,11 +13150,159 @@
         </p:nvSpPr>
         <p:spPr>
           <a:xfrm>
-            <a:off x="3152358" y="2781300"/>
-            <a:ext cx="13992642" cy="571500"/>
-          </a:xfrm>
-          <a:prstGeom prst="rect">
-            <a:avLst/>
+            <a:off x="7543800" y="2781300"/>
+            <a:ext cx="9601200" cy="590550"/>
+          </a:xfrm>
+          <a:prstGeom prst="rect">
+            <a:avLst/>
+          </a:prstGeom>
+          <a:solidFill>
+            <a:srgbClr val="1E5BC6"/>
+          </a:solidFill>
+          <a:ln>
+            <a:noFill/>
+          </a:ln>
+          <a:effectLst/>
+        </p:spPr>
+        <p:txBody>
+          <a:bodyPr rtlCol="0" anchor="ctr" wrap="square"/>
+          <a:lstStyle/>
+          <a:p>
+            <a:pPr algn="ctr"/>
+          </a:p>
+        </p:txBody>
+      </p:sp>
+      <p:sp>
+        <p:nvSpPr>
+          <p:cNvPr id="11" name="TextBox 10"/>
+          <p:cNvSpPr txBox="1"/>
+          <p:nvPr/>
+        </p:nvSpPr>
+        <p:spPr>
+          <a:xfrm>
+            <a:off x="7543800" y="2781300"/>
+            <a:ext cx="9601200" cy="590550"/>
+          </a:xfrm>
+          <a:prstGeom prst="rect">
+            <a:avLst/>
+          </a:prstGeom>
+          <a:noFill/>
+        </p:spPr>
+        <p:txBody>
+          <a:bodyPr wrap="square" lIns="0" rIns="0" tIns="0" bIns="0" anchor="ctr">
+            <a:spAutoFit/>
+          </a:bodyPr>
+          <a:lstStyle/>
+          <a:p>
+            <a:pPr algn="ctr">
+              <a:lnSpc>
+                <a:spcPct val="100000"/>
+              </a:lnSpc>
+            </a:pPr>
+            <a:r>
+              <a:rPr sz="2025" b="1">
+                <a:solidFill>
+                  <a:srgbClr val="FFFFFF"/>
+                </a:solidFill>
+                <a:latin typeface="Pretendard"/>
+                <a:ea typeface="Pretendard"/>
+                <a:cs typeface="Pretendard"/>
+              </a:rPr>
+              <a:t>실측</a:t>
+            </a:r>
+          </a:p>
+        </p:txBody>
+      </p:sp>
+      <p:sp>
+        <p:nvSpPr>
+          <p:cNvPr id="12" name="Rounded Rectangle 11"/>
+          <p:cNvSpPr/>
+          <p:nvPr/>
+        </p:nvSpPr>
+        <p:spPr>
+          <a:xfrm>
+            <a:off x="1143000" y="3448050"/>
+            <a:ext cx="6362700" cy="619125"/>
+          </a:xfrm>
+          <a:prstGeom prst="roundRect">
+            <a:avLst>
+              <a:gd name="adj" fmla="val 6153"/>
+            </a:avLst>
+          </a:prstGeom>
+          <a:solidFill>
+            <a:srgbClr val="EDF3FD"/>
+          </a:solidFill>
+          <a:ln w="9525">
+            <a:solidFill>
+              <a:srgbClr val="BFD3F5"/>
+            </a:solidFill>
+          </a:ln>
+          <a:effectLst/>
+        </p:spPr>
+        <p:txBody>
+          <a:bodyPr rtlCol="0" anchor="ctr" wrap="square"/>
+          <a:lstStyle/>
+          <a:p>
+            <a:pPr algn="ctr"/>
+          </a:p>
+        </p:txBody>
+      </p:sp>
+      <p:sp>
+        <p:nvSpPr>
+          <p:cNvPr id="13" name="TextBox 12"/>
+          <p:cNvSpPr txBox="1"/>
+          <p:nvPr/>
+        </p:nvSpPr>
+        <p:spPr>
+          <a:xfrm>
+            <a:off x="1238250" y="3448050"/>
+            <a:ext cx="6172200" cy="619125"/>
+          </a:xfrm>
+          <a:prstGeom prst="rect">
+            <a:avLst/>
+          </a:prstGeom>
+          <a:noFill/>
+        </p:spPr>
+        <p:txBody>
+          <a:bodyPr wrap="square" lIns="0" rIns="0" tIns="0" bIns="0" anchor="ctr">
+            <a:spAutoFit/>
+          </a:bodyPr>
+          <a:lstStyle/>
+          <a:p>
+            <a:pPr algn="l">
+              <a:lnSpc>
+                <a:spcPct val="115000"/>
+              </a:lnSpc>
+            </a:pPr>
+            <a:r>
+              <a:rPr sz="1875" b="1">
+                <a:solidFill>
+                  <a:srgbClr val="0D2B5E"/>
+                </a:solidFill>
+                <a:latin typeface="Pretendard"/>
+                <a:ea typeface="Pretendard"/>
+                <a:cs typeface="Pretendard"/>
+              </a:rPr>
+              <a:t>count 세 번 (1회)</a:t>
+            </a:r>
+          </a:p>
+        </p:txBody>
+      </p:sp>
+      <p:sp>
+        <p:nvSpPr>
+          <p:cNvPr id="14" name="Rounded Rectangle 13"/>
+          <p:cNvSpPr/>
+          <p:nvPr/>
+        </p:nvSpPr>
+        <p:spPr>
+          <a:xfrm>
+            <a:off x="7543800" y="3448050"/>
+            <a:ext cx="9601200" cy="619125"/>
+          </a:xfrm>
+          <a:prstGeom prst="roundRect">
+            <a:avLst>
+              <a:gd name="adj" fmla="val 6153"/>
+            </a:avLst>
           </a:prstGeom>
           <a:solidFill>
             <a:srgbClr val="FAFBFD"/>
@@ -12990,14 +13324,14 @@
       </p:sp>
       <p:sp>
         <p:nvSpPr>
-          <p:cNvPr id="11" name="TextBox 10"/>
-          <p:cNvSpPr txBox="1"/>
-          <p:nvPr/>
-        </p:nvSpPr>
-        <p:spPr>
-          <a:xfrm>
-            <a:off x="3304758" y="2781300"/>
-            <a:ext cx="13687842" cy="571500"/>
+          <p:cNvPr id="15" name="TextBox 14"/>
+          <p:cNvSpPr txBox="1"/>
+          <p:nvPr/>
+        </p:nvSpPr>
+        <p:spPr>
+          <a:xfrm>
+            <a:off x="7639050" y="3448050"/>
+            <a:ext cx="9410700" cy="619125"/>
           </a:xfrm>
           <a:prstGeom prst="rect">
             <a:avLst/>
@@ -13010,109 +13344,115 @@
           </a:bodyPr>
           <a:lstStyle/>
           <a:p>
+            <a:pPr algn="ctr">
+              <a:lnSpc>
+                <a:spcPct val="115000"/>
+              </a:lnSpc>
+            </a:pPr>
+            <a:r>
+              <a:rPr sz="1875" b="0">
+                <a:solidFill>
+                  <a:srgbClr val="3D3D3D"/>
+                </a:solidFill>
+                <a:latin typeface="Pretendard"/>
+                <a:ea typeface="Pretendard"/>
+                <a:cs typeface="Pretendard"/>
+              </a:rPr>
+              <a:t>0.27 · 0.19 · 0.17초</a:t>
+            </a:r>
+          </a:p>
+        </p:txBody>
+      </p:sp>
+      <p:sp>
+        <p:nvSpPr>
+          <p:cNvPr id="16" name="Rounded Rectangle 15"/>
+          <p:cNvSpPr/>
+          <p:nvPr/>
+        </p:nvSpPr>
+        <p:spPr>
+          <a:xfrm>
+            <a:off x="1143000" y="4143375"/>
+            <a:ext cx="6362700" cy="619125"/>
+          </a:xfrm>
+          <a:prstGeom prst="roundRect">
+            <a:avLst>
+              <a:gd name="adj" fmla="val 6153"/>
+            </a:avLst>
+          </a:prstGeom>
+          <a:solidFill>
+            <a:srgbClr val="EDF3FD"/>
+          </a:solidFill>
+          <a:ln w="9525">
+            <a:solidFill>
+              <a:srgbClr val="BFD3F5"/>
+            </a:solidFill>
+          </a:ln>
+          <a:effectLst/>
+        </p:spPr>
+        <p:txBody>
+          <a:bodyPr rtlCol="0" anchor="ctr" wrap="square"/>
+          <a:lstStyle/>
+          <a:p>
+            <a:pPr algn="ctr"/>
+          </a:p>
+        </p:txBody>
+      </p:sp>
+      <p:sp>
+        <p:nvSpPr>
+          <p:cNvPr id="17" name="TextBox 16"/>
+          <p:cNvSpPr txBox="1"/>
+          <p:nvPr/>
+        </p:nvSpPr>
+        <p:spPr>
+          <a:xfrm>
+            <a:off x="1238250" y="4143375"/>
+            <a:ext cx="6172200" cy="619125"/>
+          </a:xfrm>
+          <a:prstGeom prst="rect">
+            <a:avLst/>
+          </a:prstGeom>
+          <a:noFill/>
+        </p:spPr>
+        <p:txBody>
+          <a:bodyPr wrap="square" lIns="0" rIns="0" tIns="0" bIns="0" anchor="ctr">
+            <a:spAutoFit/>
+          </a:bodyPr>
+          <a:lstStyle/>
+          <a:p>
             <a:pPr algn="l">
               <a:lnSpc>
                 <a:spcPct val="115000"/>
               </a:lnSpc>
             </a:pPr>
             <a:r>
-              <a:rPr sz="1800" b="0">
-                <a:solidFill>
-                  <a:srgbClr val="3D3D3D"/>
-                </a:solidFill>
-                <a:latin typeface="Pretendard"/>
-                <a:ea typeface="Pretendard"/>
-                <a:cs typeface="Pretendard"/>
-              </a:rPr>
-              <a:t>spark.range(1, 20_000_001).filter("id % 7 = 0")</a:t>
-            </a:r>
-          </a:p>
-        </p:txBody>
-      </p:sp>
-      <p:sp>
-        <p:nvSpPr>
-          <p:cNvPr id="12" name="Rectangle 11"/>
-          <p:cNvSpPr/>
-          <p:nvPr/>
-        </p:nvSpPr>
-        <p:spPr>
-          <a:xfrm>
-            <a:off x="1143000" y="3429000"/>
-            <a:ext cx="2009358" cy="571500"/>
-          </a:xfrm>
-          <a:prstGeom prst="rect">
-            <a:avLst/>
-          </a:prstGeom>
-          <a:solidFill>
-            <a:srgbClr val="0D2B5E"/>
-          </a:solidFill>
-          <a:ln>
-            <a:noFill/>
-          </a:ln>
-          <a:effectLst/>
-        </p:spPr>
-        <p:txBody>
-          <a:bodyPr rtlCol="0" anchor="ctr" wrap="square"/>
-          <a:lstStyle/>
-          <a:p>
-            <a:pPr algn="ctr"/>
-          </a:p>
-        </p:txBody>
-      </p:sp>
-      <p:sp>
-        <p:nvSpPr>
-          <p:cNvPr id="13" name="TextBox 12"/>
-          <p:cNvSpPr txBox="1"/>
-          <p:nvPr/>
-        </p:nvSpPr>
-        <p:spPr>
-          <a:xfrm>
-            <a:off x="1143000" y="3429000"/>
-            <a:ext cx="2009358" cy="571500"/>
-          </a:xfrm>
-          <a:prstGeom prst="rect">
-            <a:avLst/>
-          </a:prstGeom>
-          <a:noFill/>
-        </p:spPr>
-        <p:txBody>
-          <a:bodyPr wrap="square" lIns="0" rIns="0" tIns="0" bIns="0" anchor="ctr">
-            <a:spAutoFit/>
-          </a:bodyPr>
-          <a:lstStyle/>
-          <a:p>
-            <a:pPr algn="ctr">
-              <a:lnSpc>
-                <a:spcPct val="100000"/>
-              </a:lnSpc>
-            </a:pPr>
-            <a:r>
-              <a:rPr sz="1800" b="1">
-                <a:solidFill>
-                  <a:srgbClr val="FFFFFF"/>
-                </a:solidFill>
-                <a:latin typeface="Pretendard"/>
-                <a:ea typeface="Pretendard"/>
-                <a:cs typeface="Pretendard"/>
-              </a:rPr>
-              <a:t>첫 번째</a:t>
-            </a:r>
-          </a:p>
-        </p:txBody>
-      </p:sp>
-      <p:sp>
-        <p:nvSpPr>
-          <p:cNvPr id="14" name="Rectangle 13"/>
-          <p:cNvSpPr/>
-          <p:nvPr/>
-        </p:nvSpPr>
-        <p:spPr>
-          <a:xfrm>
-            <a:off x="3152358" y="3429000"/>
-            <a:ext cx="13992642" cy="571500"/>
-          </a:xfrm>
-          <a:prstGeom prst="rect">
-            <a:avLst/>
+              <a:rPr sz="1875" b="1">
+                <a:solidFill>
+                  <a:srgbClr val="0D2B5E"/>
+                </a:solidFill>
+                <a:latin typeface="Pretendard"/>
+                <a:ea typeface="Pretendard"/>
+                <a:cs typeface="Pretendard"/>
+              </a:rPr>
+              <a:t>count 세 번 (2회)</a:t>
+            </a:r>
+          </a:p>
+        </p:txBody>
+      </p:sp>
+      <p:sp>
+        <p:nvSpPr>
+          <p:cNvPr id="18" name="Rounded Rectangle 17"/>
+          <p:cNvSpPr/>
+          <p:nvPr/>
+        </p:nvSpPr>
+        <p:spPr>
+          <a:xfrm>
+            <a:off x="7543800" y="4143375"/>
+            <a:ext cx="9601200" cy="619125"/>
+          </a:xfrm>
+          <a:prstGeom prst="roundRect">
+            <a:avLst>
+              <a:gd name="adj" fmla="val 6153"/>
+            </a:avLst>
           </a:prstGeom>
           <a:solidFill>
             <a:srgbClr val="FAFBFD"/>
@@ -13134,14 +13474,14 @@
       </p:sp>
       <p:sp>
         <p:nvSpPr>
-          <p:cNvPr id="15" name="TextBox 14"/>
-          <p:cNvSpPr txBox="1"/>
-          <p:nvPr/>
-        </p:nvSpPr>
-        <p:spPr>
-          <a:xfrm>
-            <a:off x="3304758" y="3429000"/>
-            <a:ext cx="13687842" cy="571500"/>
+          <p:cNvPr id="19" name="TextBox 18"/>
+          <p:cNvSpPr txBox="1"/>
+          <p:nvPr/>
+        </p:nvSpPr>
+        <p:spPr>
+          <a:xfrm>
+            <a:off x="7639050" y="4143375"/>
+            <a:ext cx="9410700" cy="619125"/>
           </a:xfrm>
           <a:prstGeom prst="rect">
             <a:avLst/>
@@ -13154,109 +13494,115 @@
           </a:bodyPr>
           <a:lstStyle/>
           <a:p>
+            <a:pPr algn="ctr">
+              <a:lnSpc>
+                <a:spcPct val="115000"/>
+              </a:lnSpc>
+            </a:pPr>
+            <a:r>
+              <a:rPr sz="1875" b="0">
+                <a:solidFill>
+                  <a:srgbClr val="3D3D3D"/>
+                </a:solidFill>
+                <a:latin typeface="Pretendard"/>
+                <a:ea typeface="Pretendard"/>
+                <a:cs typeface="Pretendard"/>
+              </a:rPr>
+              <a:t>0.57 · 0.33 · 0.38초 (역전)</a:t>
+            </a:r>
+          </a:p>
+        </p:txBody>
+      </p:sp>
+      <p:sp>
+        <p:nvSpPr>
+          <p:cNvPr id="20" name="Rounded Rectangle 19"/>
+          <p:cNvSpPr/>
+          <p:nvPr/>
+        </p:nvSpPr>
+        <p:spPr>
+          <a:xfrm>
+            <a:off x="1143000" y="4838700"/>
+            <a:ext cx="6362700" cy="619125"/>
+          </a:xfrm>
+          <a:prstGeom prst="roundRect">
+            <a:avLst>
+              <a:gd name="adj" fmla="val 6153"/>
+            </a:avLst>
+          </a:prstGeom>
+          <a:solidFill>
+            <a:srgbClr val="EDF3FD"/>
+          </a:solidFill>
+          <a:ln w="9525">
+            <a:solidFill>
+              <a:srgbClr val="BFD3F5"/>
+            </a:solidFill>
+          </a:ln>
+          <a:effectLst/>
+        </p:spPr>
+        <p:txBody>
+          <a:bodyPr rtlCol="0" anchor="ctr" wrap="square"/>
+          <a:lstStyle/>
+          <a:p>
+            <a:pPr algn="ctr"/>
+          </a:p>
+        </p:txBody>
+      </p:sp>
+      <p:sp>
+        <p:nvSpPr>
+          <p:cNvPr id="21" name="TextBox 20"/>
+          <p:cNvSpPr txBox="1"/>
+          <p:nvPr/>
+        </p:nvSpPr>
+        <p:spPr>
+          <a:xfrm>
+            <a:off x="1238250" y="4838700"/>
+            <a:ext cx="6172200" cy="619125"/>
+          </a:xfrm>
+          <a:prstGeom prst="rect">
+            <a:avLst/>
+          </a:prstGeom>
+          <a:noFill/>
+        </p:spPr>
+        <p:txBody>
+          <a:bodyPr wrap="square" lIns="0" rIns="0" tIns="0" bIns="0" anchor="ctr">
+            <a:spAutoFit/>
+          </a:bodyPr>
+          <a:lstStyle/>
+          <a:p>
             <a:pPr algn="l">
               <a:lnSpc>
                 <a:spcPct val="115000"/>
               </a:lnSpc>
             </a:pPr>
             <a:r>
-              <a:rPr sz="1800" b="0">
-                <a:solidFill>
-                  <a:srgbClr val="3D3D3D"/>
-                </a:solidFill>
-                <a:latin typeface="Pretendard"/>
-                <a:ea typeface="Pretendard"/>
-                <a:cs typeface="Pretendard"/>
-              </a:rPr>
-              <a:t>t0 = time.time(); big.count(); t1 = time.time()</a:t>
-            </a:r>
-          </a:p>
-        </p:txBody>
-      </p:sp>
-      <p:sp>
-        <p:nvSpPr>
-          <p:cNvPr id="16" name="Rectangle 15"/>
-          <p:cNvSpPr/>
-          <p:nvPr/>
-        </p:nvSpPr>
-        <p:spPr>
-          <a:xfrm>
-            <a:off x="1143000" y="4076700"/>
-            <a:ext cx="2009358" cy="571500"/>
-          </a:xfrm>
-          <a:prstGeom prst="rect">
-            <a:avLst/>
-          </a:prstGeom>
-          <a:solidFill>
-            <a:srgbClr val="0D2B5E"/>
-          </a:solidFill>
-          <a:ln>
-            <a:noFill/>
-          </a:ln>
-          <a:effectLst/>
-        </p:spPr>
-        <p:txBody>
-          <a:bodyPr rtlCol="0" anchor="ctr" wrap="square"/>
-          <a:lstStyle/>
-          <a:p>
-            <a:pPr algn="ctr"/>
-          </a:p>
-        </p:txBody>
-      </p:sp>
-      <p:sp>
-        <p:nvSpPr>
-          <p:cNvPr id="17" name="TextBox 16"/>
-          <p:cNvSpPr txBox="1"/>
-          <p:nvPr/>
-        </p:nvSpPr>
-        <p:spPr>
-          <a:xfrm>
-            <a:off x="1143000" y="4076700"/>
-            <a:ext cx="2009358" cy="571500"/>
-          </a:xfrm>
-          <a:prstGeom prst="rect">
-            <a:avLst/>
-          </a:prstGeom>
-          <a:noFill/>
-        </p:spPr>
-        <p:txBody>
-          <a:bodyPr wrap="square" lIns="0" rIns="0" tIns="0" bIns="0" anchor="ctr">
-            <a:spAutoFit/>
-          </a:bodyPr>
-          <a:lstStyle/>
-          <a:p>
-            <a:pPr algn="ctr">
-              <a:lnSpc>
-                <a:spcPct val="100000"/>
-              </a:lnSpc>
-            </a:pPr>
-            <a:r>
-              <a:rPr sz="1800" b="1">
-                <a:solidFill>
-                  <a:srgbClr val="FFFFFF"/>
-                </a:solidFill>
-                <a:latin typeface="Pretendard"/>
-                <a:ea typeface="Pretendard"/>
-                <a:cs typeface="Pretendard"/>
-              </a:rPr>
-              <a:t>두 번째(캐시 없음)</a:t>
-            </a:r>
-          </a:p>
-        </p:txBody>
-      </p:sp>
-      <p:sp>
-        <p:nvSpPr>
-          <p:cNvPr id="18" name="Rectangle 17"/>
-          <p:cNvSpPr/>
-          <p:nvPr/>
-        </p:nvSpPr>
-        <p:spPr>
-          <a:xfrm>
-            <a:off x="3152358" y="4076700"/>
-            <a:ext cx="13992642" cy="571500"/>
-          </a:xfrm>
-          <a:prstGeom prst="rect">
-            <a:avLst/>
+              <a:rPr sz="1875" b="1">
+                <a:solidFill>
+                  <a:srgbClr val="0D2B5E"/>
+                </a:solidFill>
+                <a:latin typeface="Pretendard"/>
+                <a:ea typeface="Pretendard"/>
+                <a:cs typeface="Pretendard"/>
+              </a:rPr>
+              <a:t>Cached Partitions</a:t>
+            </a:r>
+          </a:p>
+        </p:txBody>
+      </p:sp>
+      <p:sp>
+        <p:nvSpPr>
+          <p:cNvPr id="22" name="Rounded Rectangle 21"/>
+          <p:cNvSpPr/>
+          <p:nvPr/>
+        </p:nvSpPr>
+        <p:spPr>
+          <a:xfrm>
+            <a:off x="7543800" y="4838700"/>
+            <a:ext cx="9601200" cy="619125"/>
+          </a:xfrm>
+          <a:prstGeom prst="roundRect">
+            <a:avLst>
+              <a:gd name="adj" fmla="val 6153"/>
+            </a:avLst>
           </a:prstGeom>
           <a:solidFill>
             <a:srgbClr val="FAFBFD"/>
@@ -13278,14 +13624,14 @@
       </p:sp>
       <p:sp>
         <p:nvSpPr>
-          <p:cNvPr id="19" name="TextBox 18"/>
-          <p:cNvSpPr txBox="1"/>
-          <p:nvPr/>
-        </p:nvSpPr>
-        <p:spPr>
-          <a:xfrm>
-            <a:off x="3304758" y="4076700"/>
-            <a:ext cx="13687842" cy="571500"/>
+          <p:cNvPr id="23" name="TextBox 22"/>
+          <p:cNvSpPr txBox="1"/>
+          <p:nvPr/>
+        </p:nvSpPr>
+        <p:spPr>
+          <a:xfrm>
+            <a:off x="7639050" y="4838700"/>
+            <a:ext cx="9410700" cy="619125"/>
           </a:xfrm>
           <a:prstGeom prst="rect">
             <a:avLst/>
@@ -13298,109 +13644,115 @@
           </a:bodyPr>
           <a:lstStyle/>
           <a:p>
+            <a:pPr algn="ctr">
+              <a:lnSpc>
+                <a:spcPct val="115000"/>
+              </a:lnSpc>
+            </a:pPr>
+            <a:r>
+              <a:rPr sz="1875" b="0">
+                <a:solidFill>
+                  <a:srgbClr val="3D3D3D"/>
+                </a:solidFill>
+                <a:latin typeface="Pretendard"/>
+                <a:ea typeface="Pretendard"/>
+                <a:cs typeface="Pretendard"/>
+              </a:rPr>
+              <a:t>16 (파티션 수)</a:t>
+            </a:r>
+          </a:p>
+        </p:txBody>
+      </p:sp>
+      <p:sp>
+        <p:nvSpPr>
+          <p:cNvPr id="24" name="Rounded Rectangle 23"/>
+          <p:cNvSpPr/>
+          <p:nvPr/>
+        </p:nvSpPr>
+        <p:spPr>
+          <a:xfrm>
+            <a:off x="1143000" y="5534025"/>
+            <a:ext cx="6362700" cy="619125"/>
+          </a:xfrm>
+          <a:prstGeom prst="roundRect">
+            <a:avLst>
+              <a:gd name="adj" fmla="val 6153"/>
+            </a:avLst>
+          </a:prstGeom>
+          <a:solidFill>
+            <a:srgbClr val="EDF3FD"/>
+          </a:solidFill>
+          <a:ln w="9525">
+            <a:solidFill>
+              <a:srgbClr val="BFD3F5"/>
+            </a:solidFill>
+          </a:ln>
+          <a:effectLst/>
+        </p:spPr>
+        <p:txBody>
+          <a:bodyPr rtlCol="0" anchor="ctr" wrap="square"/>
+          <a:lstStyle/>
+          <a:p>
+            <a:pPr algn="ctr"/>
+          </a:p>
+        </p:txBody>
+      </p:sp>
+      <p:sp>
+        <p:nvSpPr>
+          <p:cNvPr id="25" name="TextBox 24"/>
+          <p:cNvSpPr txBox="1"/>
+          <p:nvPr/>
+        </p:nvSpPr>
+        <p:spPr>
+          <a:xfrm>
+            <a:off x="1238250" y="5534025"/>
+            <a:ext cx="6172200" cy="619125"/>
+          </a:xfrm>
+          <a:prstGeom prst="rect">
+            <a:avLst/>
+          </a:prstGeom>
+          <a:noFill/>
+        </p:spPr>
+        <p:txBody>
+          <a:bodyPr wrap="square" lIns="0" rIns="0" tIns="0" bIns="0" anchor="ctr">
+            <a:spAutoFit/>
+          </a:bodyPr>
+          <a:lstStyle/>
+          <a:p>
             <a:pPr algn="l">
               <a:lnSpc>
                 <a:spcPct val="115000"/>
               </a:lnSpc>
             </a:pPr>
             <a:r>
-              <a:rPr sz="1800" b="0">
-                <a:solidFill>
-                  <a:srgbClr val="3D3D3D"/>
-                </a:solidFill>
-                <a:latin typeface="Pretendard"/>
-                <a:ea typeface="Pretendard"/>
-                <a:cs typeface="Pretendard"/>
-              </a:rPr>
-              <a:t>big.count() 다시 — 비슷하게 걸린다</a:t>
-            </a:r>
-          </a:p>
-        </p:txBody>
-      </p:sp>
-      <p:sp>
-        <p:nvSpPr>
-          <p:cNvPr id="20" name="Rectangle 19"/>
-          <p:cNvSpPr/>
-          <p:nvPr/>
-        </p:nvSpPr>
-        <p:spPr>
-          <a:xfrm>
-            <a:off x="1143000" y="4724400"/>
-            <a:ext cx="2009358" cy="571500"/>
-          </a:xfrm>
-          <a:prstGeom prst="rect">
-            <a:avLst/>
-          </a:prstGeom>
-          <a:solidFill>
-            <a:srgbClr val="0D2B5E"/>
-          </a:solidFill>
-          <a:ln>
-            <a:noFill/>
-          </a:ln>
-          <a:effectLst/>
-        </p:spPr>
-        <p:txBody>
-          <a:bodyPr rtlCol="0" anchor="ctr" wrap="square"/>
-          <a:lstStyle/>
-          <a:p>
-            <a:pPr algn="ctr"/>
-          </a:p>
-        </p:txBody>
-      </p:sp>
-      <p:sp>
-        <p:nvSpPr>
-          <p:cNvPr id="21" name="TextBox 20"/>
-          <p:cNvSpPr txBox="1"/>
-          <p:nvPr/>
-        </p:nvSpPr>
-        <p:spPr>
-          <a:xfrm>
-            <a:off x="1143000" y="4724400"/>
-            <a:ext cx="2009358" cy="571500"/>
-          </a:xfrm>
-          <a:prstGeom prst="rect">
-            <a:avLst/>
-          </a:prstGeom>
-          <a:noFill/>
-        </p:spPr>
-        <p:txBody>
-          <a:bodyPr wrap="square" lIns="0" rIns="0" tIns="0" bIns="0" anchor="ctr">
-            <a:spAutoFit/>
-          </a:bodyPr>
-          <a:lstStyle/>
-          <a:p>
-            <a:pPr algn="ctr">
-              <a:lnSpc>
-                <a:spcPct val="100000"/>
-              </a:lnSpc>
-            </a:pPr>
-            <a:r>
-              <a:rPr sz="1800" b="1">
-                <a:solidFill>
-                  <a:srgbClr val="FFFFFF"/>
-                </a:solidFill>
-                <a:latin typeface="Pretendard"/>
-                <a:ea typeface="Pretendard"/>
-                <a:cs typeface="Pretendard"/>
-              </a:rPr>
-              <a:t>캐시 채우기</a:t>
-            </a:r>
-          </a:p>
-        </p:txBody>
-      </p:sp>
-      <p:sp>
-        <p:nvSpPr>
-          <p:cNvPr id="22" name="Rectangle 21"/>
-          <p:cNvSpPr/>
-          <p:nvPr/>
-        </p:nvSpPr>
-        <p:spPr>
-          <a:xfrm>
-            <a:off x="3152358" y="4724400"/>
-            <a:ext cx="13992642" cy="571500"/>
-          </a:xfrm>
-          <a:prstGeom prst="rect">
-            <a:avLst/>
+              <a:rPr sz="1875" b="1">
+                <a:solidFill>
+                  <a:srgbClr val="0D2B5E"/>
+                </a:solidFill>
+                <a:latin typeface="Pretendard"/>
+                <a:ea typeface="Pretendard"/>
+                <a:cs typeface="Pretendard"/>
+              </a:rPr>
+              <a:t>Fraction Cached</a:t>
+            </a:r>
+          </a:p>
+        </p:txBody>
+      </p:sp>
+      <p:sp>
+        <p:nvSpPr>
+          <p:cNvPr id="26" name="Rounded Rectangle 25"/>
+          <p:cNvSpPr/>
+          <p:nvPr/>
+        </p:nvSpPr>
+        <p:spPr>
+          <a:xfrm>
+            <a:off x="7543800" y="5534025"/>
+            <a:ext cx="9601200" cy="619125"/>
+          </a:xfrm>
+          <a:prstGeom prst="roundRect">
+            <a:avLst>
+              <a:gd name="adj" fmla="val 6153"/>
+            </a:avLst>
           </a:prstGeom>
           <a:solidFill>
             <a:srgbClr val="FAFBFD"/>
@@ -13422,14 +13774,14 @@
       </p:sp>
       <p:sp>
         <p:nvSpPr>
-          <p:cNvPr id="23" name="TextBox 22"/>
-          <p:cNvSpPr txBox="1"/>
-          <p:nvPr/>
-        </p:nvSpPr>
-        <p:spPr>
-          <a:xfrm>
-            <a:off x="3304758" y="4724400"/>
-            <a:ext cx="13687842" cy="571500"/>
+          <p:cNvPr id="27" name="TextBox 26"/>
+          <p:cNvSpPr txBox="1"/>
+          <p:nvPr/>
+        </p:nvSpPr>
+        <p:spPr>
+          <a:xfrm>
+            <a:off x="7639050" y="5534025"/>
+            <a:ext cx="9410700" cy="619125"/>
           </a:xfrm>
           <a:prstGeom prst="rect">
             <a:avLst/>
@@ -13442,109 +13794,115 @@
           </a:bodyPr>
           <a:lstStyle/>
           <a:p>
+            <a:pPr algn="ctr">
+              <a:lnSpc>
+                <a:spcPct val="115000"/>
+              </a:lnSpc>
+            </a:pPr>
+            <a:r>
+              <a:rPr sz="1875" b="0">
+                <a:solidFill>
+                  <a:srgbClr val="3D3D3D"/>
+                </a:solidFill>
+                <a:latin typeface="Pretendard"/>
+                <a:ea typeface="Pretendard"/>
+                <a:cs typeface="Pretendard"/>
+              </a:rPr>
+              <a:t>100%</a:t>
+            </a:r>
+          </a:p>
+        </p:txBody>
+      </p:sp>
+      <p:sp>
+        <p:nvSpPr>
+          <p:cNvPr id="28" name="Rounded Rectangle 27"/>
+          <p:cNvSpPr/>
+          <p:nvPr/>
+        </p:nvSpPr>
+        <p:spPr>
+          <a:xfrm>
+            <a:off x="1143000" y="6229350"/>
+            <a:ext cx="6362700" cy="619125"/>
+          </a:xfrm>
+          <a:prstGeom prst="roundRect">
+            <a:avLst>
+              <a:gd name="adj" fmla="val 6153"/>
+            </a:avLst>
+          </a:prstGeom>
+          <a:solidFill>
+            <a:srgbClr val="EDF3FD"/>
+          </a:solidFill>
+          <a:ln w="9525">
+            <a:solidFill>
+              <a:srgbClr val="BFD3F5"/>
+            </a:solidFill>
+          </a:ln>
+          <a:effectLst/>
+        </p:spPr>
+        <p:txBody>
+          <a:bodyPr rtlCol="0" anchor="ctr" wrap="square"/>
+          <a:lstStyle/>
+          <a:p>
+            <a:pPr algn="ctr"/>
+          </a:p>
+        </p:txBody>
+      </p:sp>
+      <p:sp>
+        <p:nvSpPr>
+          <p:cNvPr id="29" name="TextBox 28"/>
+          <p:cNvSpPr txBox="1"/>
+          <p:nvPr/>
+        </p:nvSpPr>
+        <p:spPr>
+          <a:xfrm>
+            <a:off x="1238250" y="6229350"/>
+            <a:ext cx="6172200" cy="619125"/>
+          </a:xfrm>
+          <a:prstGeom prst="rect">
+            <a:avLst/>
+          </a:prstGeom>
+          <a:noFill/>
+        </p:spPr>
+        <p:txBody>
+          <a:bodyPr wrap="square" lIns="0" rIns="0" tIns="0" bIns="0" anchor="ctr">
+            <a:spAutoFit/>
+          </a:bodyPr>
+          <a:lstStyle/>
+          <a:p>
             <a:pPr algn="l">
               <a:lnSpc>
                 <a:spcPct val="115000"/>
               </a:lnSpc>
             </a:pPr>
             <a:r>
-              <a:rPr sz="1800" b="0">
-                <a:solidFill>
-                  <a:srgbClr val="3D3D3D"/>
-                </a:solidFill>
-                <a:latin typeface="Pretendard"/>
-                <a:ea typeface="Pretendard"/>
-                <a:cs typeface="Pretendard"/>
-              </a:rPr>
-              <a:t>big.cache(); big.count()</a:t>
-            </a:r>
-          </a:p>
-        </p:txBody>
-      </p:sp>
-      <p:sp>
-        <p:nvSpPr>
-          <p:cNvPr id="24" name="Rectangle 23"/>
-          <p:cNvSpPr/>
-          <p:nvPr/>
-        </p:nvSpPr>
-        <p:spPr>
-          <a:xfrm>
-            <a:off x="1143000" y="5372100"/>
-            <a:ext cx="2009358" cy="571500"/>
-          </a:xfrm>
-          <a:prstGeom prst="rect">
-            <a:avLst/>
-          </a:prstGeom>
-          <a:solidFill>
-            <a:srgbClr val="0D2B5E"/>
-          </a:solidFill>
-          <a:ln>
-            <a:noFill/>
-          </a:ln>
-          <a:effectLst/>
-        </p:spPr>
-        <p:txBody>
-          <a:bodyPr rtlCol="0" anchor="ctr" wrap="square"/>
-          <a:lstStyle/>
-          <a:p>
-            <a:pPr algn="ctr"/>
-          </a:p>
-        </p:txBody>
-      </p:sp>
-      <p:sp>
-        <p:nvSpPr>
-          <p:cNvPr id="25" name="TextBox 24"/>
-          <p:cNvSpPr txBox="1"/>
-          <p:nvPr/>
-        </p:nvSpPr>
-        <p:spPr>
-          <a:xfrm>
-            <a:off x="1143000" y="5372100"/>
-            <a:ext cx="2009358" cy="571500"/>
-          </a:xfrm>
-          <a:prstGeom prst="rect">
-            <a:avLst/>
-          </a:prstGeom>
-          <a:noFill/>
-        </p:spPr>
-        <p:txBody>
-          <a:bodyPr wrap="square" lIns="0" rIns="0" tIns="0" bIns="0" anchor="ctr">
-            <a:spAutoFit/>
-          </a:bodyPr>
-          <a:lstStyle/>
-          <a:p>
-            <a:pPr algn="ctr">
-              <a:lnSpc>
-                <a:spcPct val="100000"/>
-              </a:lnSpc>
-            </a:pPr>
-            <a:r>
-              <a:rPr sz="1800" b="1">
-                <a:solidFill>
-                  <a:srgbClr val="FFFFFF"/>
-                </a:solidFill>
-                <a:latin typeface="Pretendard"/>
-                <a:ea typeface="Pretendard"/>
-                <a:cs typeface="Pretendard"/>
-              </a:rPr>
-              <a:t>세 번째(캐시 있음)</a:t>
-            </a:r>
-          </a:p>
-        </p:txBody>
-      </p:sp>
-      <p:sp>
-        <p:nvSpPr>
-          <p:cNvPr id="26" name="Rectangle 25"/>
-          <p:cNvSpPr/>
-          <p:nvPr/>
-        </p:nvSpPr>
-        <p:spPr>
-          <a:xfrm>
-            <a:off x="3152358" y="5372100"/>
-            <a:ext cx="13992642" cy="571500"/>
-          </a:xfrm>
-          <a:prstGeom prst="rect">
-            <a:avLst/>
+              <a:rPr sz="1875" b="1">
+                <a:solidFill>
+                  <a:srgbClr val="0D2B5E"/>
+                </a:solidFill>
+                <a:latin typeface="Pretendard"/>
+                <a:ea typeface="Pretendard"/>
+                <a:cs typeface="Pretendard"/>
+              </a:rPr>
+              <a:t>Size in Memory</a:t>
+            </a:r>
+          </a:p>
+        </p:txBody>
+      </p:sp>
+      <p:sp>
+        <p:nvSpPr>
+          <p:cNvPr id="30" name="Rounded Rectangle 29"/>
+          <p:cNvSpPr/>
+          <p:nvPr/>
+        </p:nvSpPr>
+        <p:spPr>
+          <a:xfrm>
+            <a:off x="7543800" y="6229350"/>
+            <a:ext cx="9601200" cy="619125"/>
+          </a:xfrm>
+          <a:prstGeom prst="roundRect">
+            <a:avLst>
+              <a:gd name="adj" fmla="val 6153"/>
+            </a:avLst>
           </a:prstGeom>
           <a:solidFill>
             <a:srgbClr val="FAFBFD"/>
@@ -13566,14 +13924,14 @@
       </p:sp>
       <p:sp>
         <p:nvSpPr>
-          <p:cNvPr id="27" name="TextBox 26"/>
-          <p:cNvSpPr txBox="1"/>
-          <p:nvPr/>
-        </p:nvSpPr>
-        <p:spPr>
-          <a:xfrm>
-            <a:off x="3304758" y="5372100"/>
-            <a:ext cx="13687842" cy="571500"/>
+          <p:cNvPr id="31" name="TextBox 30"/>
+          <p:cNvSpPr txBox="1"/>
+          <p:nvPr/>
+        </p:nvSpPr>
+        <p:spPr>
+          <a:xfrm>
+            <a:off x="7639050" y="6229350"/>
+            <a:ext cx="9410700" cy="619125"/>
           </a:xfrm>
           <a:prstGeom prst="rect">
             <a:avLst/>
@@ -13586,109 +13944,115 @@
           </a:bodyPr>
           <a:lstStyle/>
           <a:p>
+            <a:pPr algn="ctr">
+              <a:lnSpc>
+                <a:spcPct val="115000"/>
+              </a:lnSpc>
+            </a:pPr>
+            <a:r>
+              <a:rPr sz="1875" b="0">
+                <a:solidFill>
+                  <a:srgbClr val="3D3D3D"/>
+                </a:solidFill>
+                <a:latin typeface="Pretendard"/>
+                <a:ea typeface="Pretendard"/>
+                <a:cs typeface="Pretendard"/>
+              </a:rPr>
+              <a:t>2.8 MiB</a:t>
+            </a:r>
+          </a:p>
+        </p:txBody>
+      </p:sp>
+      <p:sp>
+        <p:nvSpPr>
+          <p:cNvPr id="32" name="Rounded Rectangle 31"/>
+          <p:cNvSpPr/>
+          <p:nvPr/>
+        </p:nvSpPr>
+        <p:spPr>
+          <a:xfrm>
+            <a:off x="1143000" y="6924675"/>
+            <a:ext cx="6362700" cy="619125"/>
+          </a:xfrm>
+          <a:prstGeom prst="roundRect">
+            <a:avLst>
+              <a:gd name="adj" fmla="val 6153"/>
+            </a:avLst>
+          </a:prstGeom>
+          <a:solidFill>
+            <a:srgbClr val="EDF3FD"/>
+          </a:solidFill>
+          <a:ln w="9525">
+            <a:solidFill>
+              <a:srgbClr val="BFD3F5"/>
+            </a:solidFill>
+          </a:ln>
+          <a:effectLst/>
+        </p:spPr>
+        <p:txBody>
+          <a:bodyPr rtlCol="0" anchor="ctr" wrap="square"/>
+          <a:lstStyle/>
+          <a:p>
+            <a:pPr algn="ctr"/>
+          </a:p>
+        </p:txBody>
+      </p:sp>
+      <p:sp>
+        <p:nvSpPr>
+          <p:cNvPr id="33" name="TextBox 32"/>
+          <p:cNvSpPr txBox="1"/>
+          <p:nvPr/>
+        </p:nvSpPr>
+        <p:spPr>
+          <a:xfrm>
+            <a:off x="1238250" y="6924675"/>
+            <a:ext cx="6172200" cy="619125"/>
+          </a:xfrm>
+          <a:prstGeom prst="rect">
+            <a:avLst/>
+          </a:prstGeom>
+          <a:noFill/>
+        </p:spPr>
+        <p:txBody>
+          <a:bodyPr wrap="square" lIns="0" rIns="0" tIns="0" bIns="0" anchor="ctr">
+            <a:spAutoFit/>
+          </a:bodyPr>
+          <a:lstStyle/>
+          <a:p>
             <a:pPr algn="l">
               <a:lnSpc>
                 <a:spcPct val="115000"/>
               </a:lnSpc>
             </a:pPr>
             <a:r>
-              <a:rPr sz="1800" b="0">
-                <a:solidFill>
-                  <a:srgbClr val="3D3D3D"/>
-                </a:solidFill>
-                <a:latin typeface="Pretendard"/>
-                <a:ea typeface="Pretendard"/>
-                <a:cs typeface="Pretendard"/>
-              </a:rPr>
-              <a:t>big.count() — 눈에 띄게 빠르다</a:t>
-            </a:r>
-          </a:p>
-        </p:txBody>
-      </p:sp>
-      <p:sp>
-        <p:nvSpPr>
-          <p:cNvPr id="28" name="Rectangle 27"/>
-          <p:cNvSpPr/>
-          <p:nvPr/>
-        </p:nvSpPr>
-        <p:spPr>
-          <a:xfrm>
-            <a:off x="1143000" y="6019800"/>
-            <a:ext cx="2009358" cy="571500"/>
-          </a:xfrm>
-          <a:prstGeom prst="rect">
-            <a:avLst/>
-          </a:prstGeom>
-          <a:solidFill>
-            <a:srgbClr val="0D2B5E"/>
-          </a:solidFill>
-          <a:ln>
-            <a:noFill/>
-          </a:ln>
-          <a:effectLst/>
-        </p:spPr>
-        <p:txBody>
-          <a:bodyPr rtlCol="0" anchor="ctr" wrap="square"/>
-          <a:lstStyle/>
-          <a:p>
-            <a:pPr algn="ctr"/>
-          </a:p>
-        </p:txBody>
-      </p:sp>
-      <p:sp>
-        <p:nvSpPr>
-          <p:cNvPr id="29" name="TextBox 28"/>
-          <p:cNvSpPr txBox="1"/>
-          <p:nvPr/>
-        </p:nvSpPr>
-        <p:spPr>
-          <a:xfrm>
-            <a:off x="1143000" y="6019800"/>
-            <a:ext cx="2009358" cy="571500"/>
-          </a:xfrm>
-          <a:prstGeom prst="rect">
-            <a:avLst/>
-          </a:prstGeom>
-          <a:noFill/>
-        </p:spPr>
-        <p:txBody>
-          <a:bodyPr wrap="square" lIns="0" rIns="0" tIns="0" bIns="0" anchor="ctr">
-            <a:spAutoFit/>
-          </a:bodyPr>
-          <a:lstStyle/>
-          <a:p>
-            <a:pPr algn="ctr">
-              <a:lnSpc>
-                <a:spcPct val="100000"/>
-              </a:lnSpc>
-            </a:pPr>
-            <a:r>
-              <a:rPr sz="1800" b="1">
-                <a:solidFill>
-                  <a:srgbClr val="FFFFFF"/>
-                </a:solidFill>
-                <a:latin typeface="Pretendard"/>
-                <a:ea typeface="Pretendard"/>
-                <a:cs typeface="Pretendard"/>
-              </a:rPr>
-              <a:t>해제</a:t>
-            </a:r>
-          </a:p>
-        </p:txBody>
-      </p:sp>
-      <p:sp>
-        <p:nvSpPr>
-          <p:cNvPr id="30" name="Rectangle 29"/>
-          <p:cNvSpPr/>
-          <p:nvPr/>
-        </p:nvSpPr>
-        <p:spPr>
-          <a:xfrm>
-            <a:off x="3152358" y="6019800"/>
-            <a:ext cx="13992642" cy="571500"/>
-          </a:xfrm>
-          <a:prstGeom prst="rect">
-            <a:avLst/>
+              <a:rPr sz="1875" b="1">
+                <a:solidFill>
+                  <a:srgbClr val="0D2B5E"/>
+                </a:solidFill>
+                <a:latin typeface="Pretendard"/>
+                <a:ea typeface="Pretendard"/>
+                <a:cs typeface="Pretendard"/>
+              </a:rPr>
+              <a:t>다 보면</a:t>
+            </a:r>
+          </a:p>
+        </p:txBody>
+      </p:sp>
+      <p:sp>
+        <p:nvSpPr>
+          <p:cNvPr id="34" name="Rounded Rectangle 33"/>
+          <p:cNvSpPr/>
+          <p:nvPr/>
+        </p:nvSpPr>
+        <p:spPr>
+          <a:xfrm>
+            <a:off x="7543800" y="6924675"/>
+            <a:ext cx="9601200" cy="619125"/>
+          </a:xfrm>
+          <a:prstGeom prst="roundRect">
+            <a:avLst>
+              <a:gd name="adj" fmla="val 6153"/>
+            </a:avLst>
           </a:prstGeom>
           <a:solidFill>
             <a:srgbClr val="FAFBFD"/>
@@ -13710,14 +14074,14 @@
       </p:sp>
       <p:sp>
         <p:nvSpPr>
-          <p:cNvPr id="31" name="TextBox 30"/>
-          <p:cNvSpPr txBox="1"/>
-          <p:nvPr/>
-        </p:nvSpPr>
-        <p:spPr>
-          <a:xfrm>
-            <a:off x="3304758" y="6019800"/>
-            <a:ext cx="13687842" cy="571500"/>
+          <p:cNvPr id="35" name="TextBox 34"/>
+          <p:cNvSpPr txBox="1"/>
+          <p:nvPr/>
+        </p:nvSpPr>
+        <p:spPr>
+          <a:xfrm>
+            <a:off x="7639050" y="6924675"/>
+            <a:ext cx="9410700" cy="619125"/>
           </a:xfrm>
           <a:prstGeom prst="rect">
             <a:avLst/>
@@ -13730,13 +14094,13 @@
           </a:bodyPr>
           <a:lstStyle/>
           <a:p>
-            <a:pPr algn="l">
+            <a:pPr algn="ctr">
               <a:lnSpc>
                 <a:spcPct val="115000"/>
               </a:lnSpc>
             </a:pPr>
             <a:r>
-              <a:rPr sz="1800" b="0">
+              <a:rPr sz="1875" b="0">
                 <a:solidFill>
                   <a:srgbClr val="3D3D3D"/>
                 </a:solidFill>
@@ -13751,7 +14115,7 @@
       </p:sp>
       <p:sp>
         <p:nvSpPr>
-          <p:cNvPr id="32" name="TextBox 31"/>
+          <p:cNvPr id="36" name="TextBox 35"/>
           <p:cNvSpPr txBox="1"/>
           <p:nvPr/>
         </p:nvSpPr>
@@ -13785,14 +14149,14 @@
                 <a:ea typeface="Pretendard"/>
                 <a:cs typeface="Pretendard"/>
               </a:rPr>
-              <a:t>확인: 세 번째가 눈에 띄게 빠르다 · Storage 탭에 캐시된 데이터가 나타난다 · 캐시는 메모리를 차지하니 정말 여러 번 쓸 때만</a:t>
-            </a:r>
-          </a:p>
-        </p:txBody>
-      </p:sp>
-      <p:sp>
-        <p:nvSpPr>
-          <p:cNvPr id="33" name="Rectangle 32"/>
+              <a:t>spark.range 는 숫자를 그 자리에서 만들어 캐시 읽기와 비용이 비슷 — 캐시는 정말 여러 번 쓸 때만</a:t>
+            </a:r>
+          </a:p>
+        </p:txBody>
+      </p:sp>
+      <p:sp>
+        <p:nvSpPr>
+          <p:cNvPr id="37" name="Rectangle 36"/>
           <p:cNvSpPr/>
           <p:nvPr/>
         </p:nvSpPr>
@@ -13822,7 +14186,7 @@
       </p:sp>
       <p:sp>
         <p:nvSpPr>
-          <p:cNvPr id="34" name="TextBox 33"/>
+          <p:cNvPr id="38" name="TextBox 37"/>
           <p:cNvSpPr txBox="1"/>
           <p:nvPr/>
         </p:nvSpPr>
@@ -13863,7 +14227,7 @@
       </p:sp>
       <p:sp>
         <p:nvSpPr>
-          <p:cNvPr id="35" name="TextBox 34"/>
+          <p:cNvPr id="39" name="TextBox 38"/>
           <p:cNvSpPr txBox="1"/>
           <p:nvPr/>
         </p:nvSpPr>
@@ -13922,7 +14286,7 @@
       <p:grpSpPr/>
       <p:sp>
         <p:nvSpPr>
-          <p:cNvPr id="2" name="Oval 1"/>
+          <p:cNvPr id="2" name="deckgen:decor"/>
           <p:cNvSpPr/>
           <p:nvPr/>
         </p:nvSpPr>
@@ -13952,7 +14316,7 @@
       </p:sp>
       <p:sp>
         <p:nvSpPr>
-          <p:cNvPr id="3" name="Oval 2"/>
+          <p:cNvPr id="3" name="deckgen:decor"/>
           <p:cNvSpPr/>
           <p:nvPr/>
         </p:nvSpPr>
@@ -13982,7 +14346,7 @@
       </p:sp>
       <p:sp>
         <p:nvSpPr>
-          <p:cNvPr id="4" name="Oval 3"/>
+          <p:cNvPr id="4" name="deckgen:decor"/>
           <p:cNvSpPr/>
           <p:nvPr/>
         </p:nvSpPr>
@@ -14046,7 +14410,7 @@
                 <a:ea typeface="Pretendard"/>
                 <a:cs typeface="Pretendard"/>
               </a:rPr>
-              <a:t>일부러 실패시키기</a:t>
+              <a:t>7단계 — 일부러 실패시키기</a:t>
             </a:r>
           </a:p>
         </p:txBody>
@@ -14087,7 +14451,7 @@
                 <a:ea typeface="Pretendard"/>
                 <a:cs typeface="Pretendard"/>
               </a:rPr>
-              <a:t>셸을 나가면 4040 도 사라진다</a:t>
+              <a:t>셸을 하나 더 띄우면 4040 이 겹친다</a:t>
             </a:r>
           </a:p>
         </p:txBody>
@@ -14158,7 +14522,7 @@
                 <a:ea typeface="Pretendard"/>
                 <a:cs typeface="Pretendard"/>
               </a:rPr>
-              <a:t>cache 까지 끝낸 뒤 일부러 셸을 나가 봅니다 — UI 가 언제까지 사는지 겪어 둡니다</a:t>
+              <a:t>셸을 띄운 채 새 창에서 같은 docker run → Bind for 0.0.0.0:4040 failed: port is already allocated</a:t>
             </a:r>
           </a:p>
         </p:txBody>
@@ -14263,7 +14627,7 @@
                 <a:ea typeface="Pretendard"/>
                 <a:cs typeface="Pretendard"/>
               </a:rPr>
-              <a:t>exit()</a:t>
+              <a:t>새 창에서</a:t>
             </a:r>
           </a:p>
         </p:txBody>
@@ -14304,7 +14668,7 @@
                 <a:ea typeface="Pretendard"/>
                 <a:cs typeface="Pretendard"/>
               </a:rPr>
-              <a:t>셸을</a:t>
+              <a:t>같은 docker run</a:t>
             </a:r>
           </a:p>
           <a:p>
@@ -14322,7 +14686,7 @@
                 <a:ea typeface="Pretendard"/>
                 <a:cs typeface="Pretendard"/>
               </a:rPr>
-              <a:t>빠져나간다</a:t>
+              <a:t>-p 4040:4040</a:t>
             </a:r>
           </a:p>
         </p:txBody>
@@ -14427,7 +14791,7 @@
                 <a:ea typeface="Pretendard"/>
                 <a:cs typeface="Pretendard"/>
               </a:rPr>
-              <a:t>4040 새로고침</a:t>
+              <a:t>실패</a:t>
             </a:r>
           </a:p>
         </p:txBody>
@@ -14468,7 +14832,7 @@
                 <a:ea typeface="Pretendard"/>
                 <a:cs typeface="Pretendard"/>
               </a:rPr>
-              <a:t>열리지</a:t>
+              <a:t>셸이 안 뜨고</a:t>
             </a:r>
           </a:p>
           <a:p>
@@ -14486,7 +14850,7 @@
                 <a:ea typeface="Pretendard"/>
                 <a:cs typeface="Pretendard"/>
               </a:rPr>
-              <a:t>않는다</a:t>
+              <a:t>바로 끝난다</a:t>
             </a:r>
           </a:p>
         </p:txBody>
@@ -14632,7 +14996,7 @@
                 <a:ea typeface="Pretendard"/>
                 <a:cs typeface="Pretendard"/>
               </a:rPr>
-              <a:t>앱이 살아 있는</a:t>
+              <a:t>4040 을 앞</a:t>
             </a:r>
           </a:p>
           <a:p>
@@ -14650,7 +15014,7 @@
                 <a:ea typeface="Pretendard"/>
                 <a:cs typeface="Pretendard"/>
               </a:rPr>
-              <a:t>동안만 UI</a:t>
+              <a:t>컨테이너가 잡음</a:t>
             </a:r>
           </a:p>
         </p:txBody>
@@ -14755,7 +15119,7 @@
                 <a:ea typeface="Pretendard"/>
                 <a:cs typeface="Pretendard"/>
               </a:rPr>
-              <a:t>다시 띄우면</a:t>
+              <a:t>해결</a:t>
             </a:r>
           </a:p>
         </p:txBody>
@@ -14796,7 +15160,7 @@
                 <a:ea typeface="Pretendard"/>
                 <a:cs typeface="Pretendard"/>
               </a:rPr>
-              <a:t>새 UI 가</a:t>
+              <a:t>앞 셸 exit()</a:t>
             </a:r>
           </a:p>
           <a:p>
@@ -14814,7 +15178,7 @@
                 <a:ea typeface="Pretendard"/>
                 <a:cs typeface="Pretendard"/>
               </a:rPr>
-              <a:t>생긴다</a:t>
+              <a:t>또는 -p 4041:4040</a:t>
             </a:r>
           </a:p>
         </p:txBody>
@@ -14919,7 +15283,7 @@
                 <a:ea typeface="Pretendard"/>
                 <a:cs typeface="Pretendard"/>
               </a:rPr>
-              <a:t>끝난 잡을 보려면</a:t>
+              <a:t>exit() 뒤</a:t>
             </a:r>
           </a:p>
         </p:txBody>
@@ -14960,7 +15324,7 @@
                 <a:ea typeface="Pretendard"/>
                 <a:cs typeface="Pretendard"/>
               </a:rPr>
-              <a:t>History Server</a:t>
+              <a:t>docker ps -a</a:t>
             </a:r>
           </a:p>
           <a:p>
@@ -14978,7 +15342,7 @@
                 <a:ea typeface="Pretendard"/>
                 <a:cs typeface="Pretendard"/>
               </a:rPr>
-              <a:t>(심화)</a:t>
+              <a:t>제목 줄만</a:t>
             </a:r>
           </a:p>
         </p:txBody>
